--- a/Story 4/Story 4 Mei Qi Ng.pptx
+++ b/Story 4/Story 4 Mei Qi Ng.pptx
@@ -4649,7 +4649,19 @@
         <a:p>
           <a:r>
             <a:rPr lang="en-US" b="1" dirty="0"/>
-            <a:t>Chart 1 Bar Chart — Direct baseline salary comparison across technical specializations.</a:t>
+            <a:t>Chart 1 Bar charts</a:t>
+          </a:r>
+        </a:p>
+        <a:p>
+          <a:r>
+            <a:rPr lang="en-US" b="1" dirty="0"/>
+            <a:t> (Macro &amp; Micro) — </a:t>
+          </a:r>
+        </a:p>
+        <a:p>
+          <a:r>
+            <a:rPr lang="en-US" b="1" dirty="0"/>
+            <a:t>Direct baseline salary comparison across broad and specific  specializations</a:t>
           </a:r>
           <a:endParaRPr lang="en-US" dirty="0"/>
         </a:p>
@@ -4686,7 +4698,7 @@
         <a:p>
           <a:r>
             <a:rPr lang="en-US" b="1" dirty="0"/>
-            <a:t>Chart 2 Box Plots — Distributional analysis revealing the income ceilings by role.</a:t>
+            <a:t>Chart 2 Box Plots  Distributional analysis revealing income ceilings by role</a:t>
           </a:r>
           <a:endParaRPr lang="en-US" dirty="0"/>
         </a:p>
@@ -4723,7 +4735,13 @@
         <a:p>
           <a:r>
             <a:rPr lang="en-US" b="1" dirty="0"/>
-            <a:t>Chart 3 Dot Plot —geographic salary variation highlighting the top tech hubs.</a:t>
+            <a:t>Chart 3 Dot Plot</a:t>
+          </a:r>
+        </a:p>
+        <a:p>
+          <a:r>
+            <a:rPr lang="en-US" b="1" dirty="0"/>
+            <a:t>Geographic salary variation highlighting the top tech hubs</a:t>
           </a:r>
           <a:endParaRPr lang="en-US" dirty="0"/>
         </a:p>
@@ -4760,15 +4778,13 @@
         <a:p>
           <a:r>
             <a:rPr lang="en-US" b="1" dirty="0"/>
-            <a:t>Chart 3 Range Plot — </a:t>
+            <a:t>Chart 3 Range Plot </a:t>
           </a:r>
-          <a:r>
-            <a:rPr lang="en-US" b="1" dirty="0" err="1"/>
-            <a:t>Statedistribution</a:t>
-          </a:r>
+        </a:p>
+        <a:p>
           <a:r>
             <a:rPr lang="en-US" b="1" dirty="0"/>
-            <a:t> ceilings and the ultimate compensation multiplier.</a:t>
+            <a:t> State distribution ceilings and the ultimate compensation multiplier</a:t>
           </a:r>
           <a:endParaRPr lang="en-US" dirty="0"/>
         </a:p>
@@ -4842,7 +4858,7 @@
       <dgm:spPr/>
     </dgm:pt>
     <dgm:pt modelId="{882E2E22-A670-4E16-AA2C-01FF6EBF1AA6}" type="pres">
-      <dgm:prSet presAssocID="{4051450C-E909-429A-8CC0-3F6A42A2BFC1}" presName="node" presStyleLbl="node1" presStyleIdx="3" presStyleCnt="4">
+      <dgm:prSet presAssocID="{4051450C-E909-429A-8CC0-3F6A42A2BFC1}" presName="node" presStyleLbl="node1" presStyleIdx="3" presStyleCnt="4" custLinFactNeighborX="1269" custLinFactNeighborY="39">
         <dgm:presLayoutVars>
           <dgm:bulletEnabled val="1"/>
         </dgm:presLayoutVars>
@@ -5030,7 +5046,7 @@
 <dgm:dataModel xmlns:dgm="http://schemas.openxmlformats.org/drawingml/2006/diagram" xmlns:a="http://schemas.openxmlformats.org/drawingml/2006/main">
   <dgm:ptLst>
     <dgm:pt modelId="{7633DCE3-76FB-4763-BADB-7E0B676897F2}" type="doc">
-      <dgm:prSet loTypeId="urn:microsoft.com/office/officeart/2005/8/layout/default" loCatId="list" qsTypeId="urn:microsoft.com/office/officeart/2005/8/quickstyle/simple4" qsCatId="simple" csTypeId="urn:microsoft.com/office/officeart/2005/8/colors/accent2_2" csCatId="accent2" phldr="1"/>
+      <dgm:prSet loTypeId="urn:microsoft.com/office/officeart/2005/8/layout/vList3" loCatId="list" qsTypeId="urn:microsoft.com/office/officeart/2005/8/quickstyle/3d1" qsCatId="3D" csTypeId="urn:microsoft.com/office/officeart/2005/8/colors/accent2_2" csCatId="accent2" phldr="1"/>
       <dgm:spPr/>
       <dgm:t>
         <a:bodyPr/>
@@ -5047,11 +5063,46 @@
         <a:bodyPr/>
         <a:lstStyle/>
         <a:p>
+          <a:pPr>
+            <a:buNone/>
+          </a:pPr>
           <a:r>
             <a:rPr lang="en-US" b="1" dirty="0"/>
-            <a:t>Chart 1 Bar Chart — Direct baseline salary comparison across technical specializations.</a:t>
+            <a:t>Specialization Floor:</a:t>
           </a:r>
-          <a:endParaRPr lang="en-US" dirty="0"/>
+          <a:r>
+            <a:rPr lang="en-US" dirty="0"/>
+            <a:t> Analytics serves as the baseline. Moving into higher macro-roles (Data Science/Engineering) adds $65k, driven by titles like </a:t>
+          </a:r>
+          <a:r>
+            <a:rPr lang="en-US" i="1" dirty="0"/>
+            <a:t>Data Architect</a:t>
+          </a:r>
+          <a:r>
+            <a:rPr lang="en-US" dirty="0"/>
+            <a:t> and </a:t>
+          </a:r>
+          <a:r>
+            <a:rPr lang="en-US" dirty="0" err="1"/>
+            <a:t>ML</a:t>
+          </a:r>
+          <a:r>
+            <a:rPr lang="en-US" i="1" dirty="0" err="1"/>
+            <a:t>Engineer</a:t>
+          </a:r>
+          <a:r>
+            <a:rPr lang="en-US" dirty="0"/>
+            <a:t> which push base averages past $</a:t>
+          </a:r>
+          <a:r>
+            <a:rPr lang="en-US" b="1" dirty="0"/>
+            <a:t>160,000</a:t>
+          </a:r>
+          <a:endParaRPr lang="en-US" b="1" dirty="0">
+            <a:solidFill>
+              <a:srgbClr val="FFFFFF"/>
+            </a:solidFill>
+          </a:endParaRPr>
         </a:p>
       </dgm:t>
     </dgm:pt>
@@ -5078,17 +5129,33 @@
       </dgm:t>
     </dgm:pt>
     <dgm:pt modelId="{02B72DF9-1D40-47E2-84CB-3D6CBF09ED87}">
-      <dgm:prSet/>
+      <dgm:prSet custT="1"/>
       <dgm:spPr/>
       <dgm:t>
         <a:bodyPr/>
         <a:lstStyle/>
         <a:p>
           <a:r>
-            <a:rPr lang="en-US" b="1" dirty="0"/>
-            <a:t>Chart 2 Box Plots — Distributional analysis revealing the income ceilings by role.</a:t>
+            <a:rPr lang="en-US" sz="1800" b="1" dirty="0"/>
+            <a:t>Geographic Multiplier:</a:t>
           </a:r>
-          <a:endParaRPr lang="en-US" dirty="0"/>
+          <a:r>
+            <a:rPr lang="en-US" sz="1800" dirty="0"/>
+            <a:t> Geography acts as a rigid multiplier. Audited government tax data proves that coastal hubs (California, Washington, Massachusetts) shift the entire baseline </a:t>
+          </a:r>
+          <a:r>
+            <a:rPr lang="en-US" sz="1800" b="1" dirty="0"/>
+            <a:t>$25,000+</a:t>
+          </a:r>
+          <a:r>
+            <a:rPr lang="en-US" sz="1800" dirty="0"/>
+            <a:t> above the national average</a:t>
+          </a:r>
+          <a:endParaRPr lang="en-US" sz="1800" dirty="0">
+            <a:solidFill>
+              <a:srgbClr val="FFFFFF"/>
+            </a:solidFill>
+          </a:endParaRPr>
         </a:p>
       </dgm:t>
     </dgm:pt>
@@ -5115,17 +5182,33 @@
       </dgm:t>
     </dgm:pt>
     <dgm:pt modelId="{19BE991B-A70E-4396-9962-A416BF109311}">
-      <dgm:prSet/>
+      <dgm:prSet custT="1"/>
       <dgm:spPr/>
       <dgm:t>
         <a:bodyPr/>
         <a:lstStyle/>
         <a:p>
           <a:r>
-            <a:rPr lang="en-US" b="1" dirty="0"/>
-            <a:t>Chart 3 Dot Plot —geographic salary variation highlighting the top tech hubs.</a:t>
+            <a:rPr lang="en-US" sz="1800" b="1" dirty="0"/>
+            <a:t>Ceiling:</a:t>
           </a:r>
-          <a:endParaRPr lang="en-US" dirty="0"/>
+          <a:r>
+            <a:rPr lang="en-US" sz="1800" dirty="0"/>
+            <a:t> Averages hide the ceiling. High paid titles stacked within a top tier geographic market, the top 25% of practitioners break through the </a:t>
+          </a:r>
+          <a:r>
+            <a:rPr lang="en-US" sz="1800" b="1" dirty="0"/>
+            <a:t>$170,000 to $216,000</a:t>
+          </a:r>
+          <a:r>
+            <a:rPr lang="en-US" sz="1800" dirty="0"/>
+            <a:t> threshold in base pay alone</a:t>
+          </a:r>
+          <a:endParaRPr lang="en-US" sz="1800" dirty="0">
+            <a:solidFill>
+              <a:srgbClr val="FFFFFF"/>
+            </a:solidFill>
+          </a:endParaRPr>
         </a:p>
       </dgm:t>
     </dgm:pt>
@@ -5151,53 +5234,8 @@
         </a:p>
       </dgm:t>
     </dgm:pt>
-    <dgm:pt modelId="{4051450C-E909-429A-8CC0-3F6A42A2BFC1}">
-      <dgm:prSet/>
-      <dgm:spPr/>
-      <dgm:t>
-        <a:bodyPr/>
-        <a:lstStyle/>
-        <a:p>
-          <a:r>
-            <a:rPr lang="en-US" b="1" dirty="0"/>
-            <a:t>Chart 3 Range Plot — </a:t>
-          </a:r>
-          <a:r>
-            <a:rPr lang="en-US" b="1" dirty="0" err="1"/>
-            <a:t>Statedistribution</a:t>
-          </a:r>
-          <a:r>
-            <a:rPr lang="en-US" b="1" dirty="0"/>
-            <a:t> ceilings and the ultimate compensation multiplier.</a:t>
-          </a:r>
-          <a:endParaRPr lang="en-US" dirty="0"/>
-        </a:p>
-      </dgm:t>
-    </dgm:pt>
-    <dgm:pt modelId="{4F6FAA75-2058-4CF3-8DA3-8972AF5AEEFF}" type="parTrans" cxnId="{C43250E4-C6B5-406E-9FF3-77190CA1CBC4}">
-      <dgm:prSet/>
-      <dgm:spPr/>
-      <dgm:t>
-        <a:bodyPr/>
-        <a:lstStyle/>
-        <a:p>
-          <a:endParaRPr lang="en-US"/>
-        </a:p>
-      </dgm:t>
-    </dgm:pt>
-    <dgm:pt modelId="{76A96645-EBE7-4855-BB9B-DB130AA23A4D}" type="sibTrans" cxnId="{C43250E4-C6B5-406E-9FF3-77190CA1CBC4}">
-      <dgm:prSet/>
-      <dgm:spPr/>
-      <dgm:t>
-        <a:bodyPr/>
-        <a:lstStyle/>
-        <a:p>
-          <a:endParaRPr lang="en-US"/>
-        </a:p>
-      </dgm:t>
-    </dgm:pt>
-    <dgm:pt modelId="{0933937D-677F-4BCD-8785-3D63D104689F}" type="pres">
-      <dgm:prSet presAssocID="{7633DCE3-76FB-4763-BADB-7E0B676897F2}" presName="diagram" presStyleCnt="0">
+    <dgm:pt modelId="{0125AA5E-C713-4C0A-A29F-24D2122F8C95}" type="pres">
+      <dgm:prSet presAssocID="{7633DCE3-76FB-4763-BADB-7E0B676897F2}" presName="linearFlow" presStyleCnt="0">
         <dgm:presLayoutVars>
           <dgm:dir/>
           <dgm:resizeHandles val="exact"/>
@@ -5205,44 +5243,56 @@
       </dgm:prSet>
       <dgm:spPr/>
     </dgm:pt>
-    <dgm:pt modelId="{33764060-0E97-40DE-8807-09B074598153}" type="pres">
-      <dgm:prSet presAssocID="{60E04618-B4ED-43BF-B1BE-967FC3496F4A}" presName="node" presStyleLbl="node1" presStyleIdx="0" presStyleCnt="4">
+    <dgm:pt modelId="{6D9F2EE4-60A6-4178-9766-4EE9A04597C4}" type="pres">
+      <dgm:prSet presAssocID="{60E04618-B4ED-43BF-B1BE-967FC3496F4A}" presName="composite" presStyleCnt="0"/>
+      <dgm:spPr/>
+    </dgm:pt>
+    <dgm:pt modelId="{266E6180-6C81-4895-80FC-EF5058230934}" type="pres">
+      <dgm:prSet presAssocID="{60E04618-B4ED-43BF-B1BE-967FC3496F4A}" presName="imgShp" presStyleLbl="fgImgPlace1" presStyleIdx="0" presStyleCnt="3" custScaleX="184252" custScaleY="167847" custLinFactX="-99991" custLinFactNeighborX="-100000" custLinFactNeighborY="16787"/>
+      <dgm:spPr/>
+    </dgm:pt>
+    <dgm:pt modelId="{B6E23937-A962-4B3C-B42E-EB9206D00CA9}" type="pres">
+      <dgm:prSet presAssocID="{60E04618-B4ED-43BF-B1BE-967FC3496F4A}" presName="txShp" presStyleLbl="node1" presStyleIdx="0" presStyleCnt="3" custScaleX="130657" custScaleY="226929">
         <dgm:presLayoutVars>
           <dgm:bulletEnabled val="1"/>
         </dgm:presLayoutVars>
       </dgm:prSet>
       <dgm:spPr/>
     </dgm:pt>
-    <dgm:pt modelId="{6F8A435E-897B-467D-8C8A-C5315A1E947F}" type="pres">
-      <dgm:prSet presAssocID="{27E48ADB-DDD0-4D58-9B3A-AF03CCE36DEA}" presName="sibTrans" presStyleCnt="0"/>
+    <dgm:pt modelId="{4A13F035-02E0-404B-B16F-83350F375F93}" type="pres">
+      <dgm:prSet presAssocID="{27E48ADB-DDD0-4D58-9B3A-AF03CCE36DEA}" presName="spacing" presStyleCnt="0"/>
       <dgm:spPr/>
     </dgm:pt>
-    <dgm:pt modelId="{6DD9BC09-5125-446E-B501-50A2887C8596}" type="pres">
-      <dgm:prSet presAssocID="{02B72DF9-1D40-47E2-84CB-3D6CBF09ED87}" presName="node" presStyleLbl="node1" presStyleIdx="1" presStyleCnt="4">
+    <dgm:pt modelId="{62D64323-2BCF-4675-BCD5-BAF409386060}" type="pres">
+      <dgm:prSet presAssocID="{02B72DF9-1D40-47E2-84CB-3D6CBF09ED87}" presName="composite" presStyleCnt="0"/>
+      <dgm:spPr/>
+    </dgm:pt>
+    <dgm:pt modelId="{8372195C-9932-4571-9241-3BD0E9226CD7}" type="pres">
+      <dgm:prSet presAssocID="{02B72DF9-1D40-47E2-84CB-3D6CBF09ED87}" presName="imgShp" presStyleLbl="fgImgPlace1" presStyleIdx="1" presStyleCnt="3" custScaleX="187736" custScaleY="157814" custLinFactX="-99060" custLinFactNeighborX="-100000" custLinFactNeighborY="20190"/>
+      <dgm:spPr/>
+    </dgm:pt>
+    <dgm:pt modelId="{12BA3B4B-527F-45AE-B6CD-064895B0BBCF}" type="pres">
+      <dgm:prSet presAssocID="{02B72DF9-1D40-47E2-84CB-3D6CBF09ED87}" presName="txShp" presStyleLbl="node1" presStyleIdx="1" presStyleCnt="3" custScaleX="137096" custScaleY="271310">
         <dgm:presLayoutVars>
           <dgm:bulletEnabled val="1"/>
         </dgm:presLayoutVars>
       </dgm:prSet>
       <dgm:spPr/>
     </dgm:pt>
-    <dgm:pt modelId="{33E98733-1D15-4039-A501-D77A78C8827F}" type="pres">
-      <dgm:prSet presAssocID="{ADE15A77-9F36-4AC2-85D4-E4EDB7C1334C}" presName="sibTrans" presStyleCnt="0"/>
+    <dgm:pt modelId="{DE496319-DFDE-456E-B2E0-4235B308753A}" type="pres">
+      <dgm:prSet presAssocID="{ADE15A77-9F36-4AC2-85D4-E4EDB7C1334C}" presName="spacing" presStyleCnt="0"/>
       <dgm:spPr/>
     </dgm:pt>
-    <dgm:pt modelId="{4E0A92B7-2148-4C6F-A3C6-0BC82C8DDFDE}" type="pres">
-      <dgm:prSet presAssocID="{19BE991B-A70E-4396-9962-A416BF109311}" presName="node" presStyleLbl="node1" presStyleIdx="2" presStyleCnt="4">
-        <dgm:presLayoutVars>
-          <dgm:bulletEnabled val="1"/>
-        </dgm:presLayoutVars>
-      </dgm:prSet>
+    <dgm:pt modelId="{A8D63B1A-1E75-44CB-B8CF-26E7093136F3}" type="pres">
+      <dgm:prSet presAssocID="{19BE991B-A70E-4396-9962-A416BF109311}" presName="composite" presStyleCnt="0"/>
       <dgm:spPr/>
     </dgm:pt>
-    <dgm:pt modelId="{53C826F9-D6C3-4FAB-B0AA-C425F256F4FD}" type="pres">
-      <dgm:prSet presAssocID="{923C28F1-5909-4EA6-AEFE-85DAA9F29B8B}" presName="sibTrans" presStyleCnt="0"/>
+    <dgm:pt modelId="{DA25E5E9-B0E4-4CAB-B20C-0D5119E00C2F}" type="pres">
+      <dgm:prSet presAssocID="{19BE991B-A70E-4396-9962-A416BF109311}" presName="imgShp" presStyleLbl="fgImgPlace1" presStyleIdx="2" presStyleCnt="3" custScaleX="172586" custScaleY="161221" custLinFactX="-82264" custLinFactNeighborX="-100000" custLinFactNeighborY="-26543"/>
       <dgm:spPr/>
     </dgm:pt>
-    <dgm:pt modelId="{882E2E22-A670-4E16-AA2C-01FF6EBF1AA6}" type="pres">
-      <dgm:prSet presAssocID="{4051450C-E909-429A-8CC0-3F6A42A2BFC1}" presName="node" presStyleLbl="node1" presStyleIdx="3" presStyleCnt="4">
+    <dgm:pt modelId="{625DC17F-875A-40A5-B324-FB856848FE2C}" type="pres">
+      <dgm:prSet presAssocID="{19BE991B-A70E-4396-9962-A416BF109311}" presName="txShp" presStyleLbl="node1" presStyleIdx="2" presStyleCnt="3" custScaleX="128844" custScaleY="333892" custLinFactNeighborX="75" custLinFactNeighborY="387">
         <dgm:presLayoutVars>
           <dgm:bulletEnabled val="1"/>
         </dgm:presLayoutVars>
@@ -5251,22 +5301,24 @@
     </dgm:pt>
   </dgm:ptLst>
   <dgm:cxnLst>
-    <dgm:cxn modelId="{51D98E07-6B5C-498F-A354-E1DEE22A796A}" type="presOf" srcId="{02B72DF9-1D40-47E2-84CB-3D6CBF09ED87}" destId="{6DD9BC09-5125-446E-B501-50A2887C8596}" srcOrd="0" destOrd="0" presId="urn:microsoft.com/office/officeart/2005/8/layout/default"/>
-    <dgm:cxn modelId="{005E9E11-DDF2-4006-A2ED-FCBE0FF7624A}" type="presOf" srcId="{4051450C-E909-429A-8CC0-3F6A42A2BFC1}" destId="{882E2E22-A670-4E16-AA2C-01FF6EBF1AA6}" srcOrd="0" destOrd="0" presId="urn:microsoft.com/office/officeart/2005/8/layout/default"/>
+    <dgm:cxn modelId="{BD601E16-4858-4AD7-9AD8-ADC33AF1B8D0}" type="presOf" srcId="{19BE991B-A70E-4396-9962-A416BF109311}" destId="{625DC17F-875A-40A5-B324-FB856848FE2C}" srcOrd="0" destOrd="0" presId="urn:microsoft.com/office/officeart/2005/8/layout/vList3"/>
     <dgm:cxn modelId="{31397663-6C67-4C4D-940B-DD9931BE804F}" srcId="{7633DCE3-76FB-4763-BADB-7E0B676897F2}" destId="{19BE991B-A70E-4396-9962-A416BF109311}" srcOrd="2" destOrd="0" parTransId="{F3D8B0B3-E289-4070-BE36-49B19D6345CE}" sibTransId="{923C28F1-5909-4EA6-AEFE-85DAA9F29B8B}"/>
-    <dgm:cxn modelId="{F92B136A-47A2-4E20-B769-7E53FF281835}" type="presOf" srcId="{60E04618-B4ED-43BF-B1BE-967FC3496F4A}" destId="{33764060-0E97-40DE-8807-09B074598153}" srcOrd="0" destOrd="0" presId="urn:microsoft.com/office/officeart/2005/8/layout/default"/>
-    <dgm:cxn modelId="{3A636B93-D2B5-4D96-A3FC-CA2C09B55324}" type="presOf" srcId="{7633DCE3-76FB-4763-BADB-7E0B676897F2}" destId="{0933937D-677F-4BCD-8785-3D63D104689F}" srcOrd="0" destOrd="0" presId="urn:microsoft.com/office/officeart/2005/8/layout/default"/>
-    <dgm:cxn modelId="{27D55A9C-3E0F-4986-8852-7B56CC3943A6}" type="presOf" srcId="{19BE991B-A70E-4396-9962-A416BF109311}" destId="{4E0A92B7-2148-4C6F-A3C6-0BC82C8DDFDE}" srcOrd="0" destOrd="0" presId="urn:microsoft.com/office/officeart/2005/8/layout/default"/>
+    <dgm:cxn modelId="{BF09EB69-E9F0-4F19-88FD-F1F26CA6DBD9}" type="presOf" srcId="{02B72DF9-1D40-47E2-84CB-3D6CBF09ED87}" destId="{12BA3B4B-527F-45AE-B6CD-064895B0BBCF}" srcOrd="0" destOrd="0" presId="urn:microsoft.com/office/officeart/2005/8/layout/vList3"/>
+    <dgm:cxn modelId="{4C88237D-A19F-4CB7-BA6D-83D357E6E8E8}" type="presOf" srcId="{7633DCE3-76FB-4763-BADB-7E0B676897F2}" destId="{0125AA5E-C713-4C0A-A29F-24D2122F8C95}" srcOrd="0" destOrd="0" presId="urn:microsoft.com/office/officeart/2005/8/layout/vList3"/>
     <dgm:cxn modelId="{98D3A1A0-E9EB-4649-9B29-3A5A4C1DF945}" srcId="{7633DCE3-76FB-4763-BADB-7E0B676897F2}" destId="{60E04618-B4ED-43BF-B1BE-967FC3496F4A}" srcOrd="0" destOrd="0" parTransId="{F3F56AAF-E120-4706-8698-F372C4B934B7}" sibTransId="{27E48ADB-DDD0-4D58-9B3A-AF03CCE36DEA}"/>
+    <dgm:cxn modelId="{2C4414AC-36A4-4314-8214-4B548DF4CBA6}" type="presOf" srcId="{60E04618-B4ED-43BF-B1BE-967FC3496F4A}" destId="{B6E23937-A962-4B3C-B42E-EB9206D00CA9}" srcOrd="0" destOrd="0" presId="urn:microsoft.com/office/officeart/2005/8/layout/vList3"/>
     <dgm:cxn modelId="{36403FD5-F7D3-44CB-9FC5-798EE03B580B}" srcId="{7633DCE3-76FB-4763-BADB-7E0B676897F2}" destId="{02B72DF9-1D40-47E2-84CB-3D6CBF09ED87}" srcOrd="1" destOrd="0" parTransId="{6BA29827-C61E-4BD5-9CA4-82CFA58A5BA4}" sibTransId="{ADE15A77-9F36-4AC2-85D4-E4EDB7C1334C}"/>
-    <dgm:cxn modelId="{C43250E4-C6B5-406E-9FF3-77190CA1CBC4}" srcId="{7633DCE3-76FB-4763-BADB-7E0B676897F2}" destId="{4051450C-E909-429A-8CC0-3F6A42A2BFC1}" srcOrd="3" destOrd="0" parTransId="{4F6FAA75-2058-4CF3-8DA3-8972AF5AEEFF}" sibTransId="{76A96645-EBE7-4855-BB9B-DB130AA23A4D}"/>
-    <dgm:cxn modelId="{899D3FB6-A245-4558-95B6-B26E7704942D}" type="presParOf" srcId="{0933937D-677F-4BCD-8785-3D63D104689F}" destId="{33764060-0E97-40DE-8807-09B074598153}" srcOrd="0" destOrd="0" presId="urn:microsoft.com/office/officeart/2005/8/layout/default"/>
-    <dgm:cxn modelId="{47C2A2ED-4B21-4C00-AB97-B0D2C57136A3}" type="presParOf" srcId="{0933937D-677F-4BCD-8785-3D63D104689F}" destId="{6F8A435E-897B-467D-8C8A-C5315A1E947F}" srcOrd="1" destOrd="0" presId="urn:microsoft.com/office/officeart/2005/8/layout/default"/>
-    <dgm:cxn modelId="{A3F42F45-BFFD-49F3-BB08-C9DBEC4B0090}" type="presParOf" srcId="{0933937D-677F-4BCD-8785-3D63D104689F}" destId="{6DD9BC09-5125-446E-B501-50A2887C8596}" srcOrd="2" destOrd="0" presId="urn:microsoft.com/office/officeart/2005/8/layout/default"/>
-    <dgm:cxn modelId="{8F4C1596-081B-4A9A-8372-1B056CB00F34}" type="presParOf" srcId="{0933937D-677F-4BCD-8785-3D63D104689F}" destId="{33E98733-1D15-4039-A501-D77A78C8827F}" srcOrd="3" destOrd="0" presId="urn:microsoft.com/office/officeart/2005/8/layout/default"/>
-    <dgm:cxn modelId="{69D81230-F236-4A29-8C13-804A30BE7321}" type="presParOf" srcId="{0933937D-677F-4BCD-8785-3D63D104689F}" destId="{4E0A92B7-2148-4C6F-A3C6-0BC82C8DDFDE}" srcOrd="4" destOrd="0" presId="urn:microsoft.com/office/officeart/2005/8/layout/default"/>
-    <dgm:cxn modelId="{392B600A-224E-4DA2-B72F-4C9AD761E813}" type="presParOf" srcId="{0933937D-677F-4BCD-8785-3D63D104689F}" destId="{53C826F9-D6C3-4FAB-B0AA-C425F256F4FD}" srcOrd="5" destOrd="0" presId="urn:microsoft.com/office/officeart/2005/8/layout/default"/>
-    <dgm:cxn modelId="{D7E3A89C-1B98-4172-8386-E8988F6FDF54}" type="presParOf" srcId="{0933937D-677F-4BCD-8785-3D63D104689F}" destId="{882E2E22-A670-4E16-AA2C-01FF6EBF1AA6}" srcOrd="6" destOrd="0" presId="urn:microsoft.com/office/officeart/2005/8/layout/default"/>
+    <dgm:cxn modelId="{3BD28971-07E6-4FDD-89F2-EF746DB48BC4}" type="presParOf" srcId="{0125AA5E-C713-4C0A-A29F-24D2122F8C95}" destId="{6D9F2EE4-60A6-4178-9766-4EE9A04597C4}" srcOrd="0" destOrd="0" presId="urn:microsoft.com/office/officeart/2005/8/layout/vList3"/>
+    <dgm:cxn modelId="{DF283501-5498-4241-A97A-A84AEF6722E0}" type="presParOf" srcId="{6D9F2EE4-60A6-4178-9766-4EE9A04597C4}" destId="{266E6180-6C81-4895-80FC-EF5058230934}" srcOrd="0" destOrd="0" presId="urn:microsoft.com/office/officeart/2005/8/layout/vList3"/>
+    <dgm:cxn modelId="{882A39C9-D878-4F38-B867-2DB0A35AC82A}" type="presParOf" srcId="{6D9F2EE4-60A6-4178-9766-4EE9A04597C4}" destId="{B6E23937-A962-4B3C-B42E-EB9206D00CA9}" srcOrd="1" destOrd="0" presId="urn:microsoft.com/office/officeart/2005/8/layout/vList3"/>
+    <dgm:cxn modelId="{93E044F2-A3AF-44E1-B1C6-6673197675B6}" type="presParOf" srcId="{0125AA5E-C713-4C0A-A29F-24D2122F8C95}" destId="{4A13F035-02E0-404B-B16F-83350F375F93}" srcOrd="1" destOrd="0" presId="urn:microsoft.com/office/officeart/2005/8/layout/vList3"/>
+    <dgm:cxn modelId="{706EC123-DC67-4458-8AD1-D89959C262C0}" type="presParOf" srcId="{0125AA5E-C713-4C0A-A29F-24D2122F8C95}" destId="{62D64323-2BCF-4675-BCD5-BAF409386060}" srcOrd="2" destOrd="0" presId="urn:microsoft.com/office/officeart/2005/8/layout/vList3"/>
+    <dgm:cxn modelId="{56D1EF58-C6C1-4EA0-AF08-F9105ACAB919}" type="presParOf" srcId="{62D64323-2BCF-4675-BCD5-BAF409386060}" destId="{8372195C-9932-4571-9241-3BD0E9226CD7}" srcOrd="0" destOrd="0" presId="urn:microsoft.com/office/officeart/2005/8/layout/vList3"/>
+    <dgm:cxn modelId="{70E9BD95-8C96-4F65-9339-BA1C13090D8A}" type="presParOf" srcId="{62D64323-2BCF-4675-BCD5-BAF409386060}" destId="{12BA3B4B-527F-45AE-B6CD-064895B0BBCF}" srcOrd="1" destOrd="0" presId="urn:microsoft.com/office/officeart/2005/8/layout/vList3"/>
+    <dgm:cxn modelId="{F60F27E3-98A4-444F-92E0-64283E773057}" type="presParOf" srcId="{0125AA5E-C713-4C0A-A29F-24D2122F8C95}" destId="{DE496319-DFDE-456E-B2E0-4235B308753A}" srcOrd="3" destOrd="0" presId="urn:microsoft.com/office/officeart/2005/8/layout/vList3"/>
+    <dgm:cxn modelId="{350CEC1C-1975-48C9-A0E8-4A4FC30C0853}" type="presParOf" srcId="{0125AA5E-C713-4C0A-A29F-24D2122F8C95}" destId="{A8D63B1A-1E75-44CB-B8CF-26E7093136F3}" srcOrd="4" destOrd="0" presId="urn:microsoft.com/office/officeart/2005/8/layout/vList3"/>
+    <dgm:cxn modelId="{5C97E7A1-48C6-48F3-93ED-1ED85F68D605}" type="presParOf" srcId="{A8D63B1A-1E75-44CB-B8CF-26E7093136F3}" destId="{DA25E5E9-B0E4-4CAB-B20C-0D5119E00C2F}" srcOrd="0" destOrd="0" presId="urn:microsoft.com/office/officeart/2005/8/layout/vList3"/>
+    <dgm:cxn modelId="{DBD09A2B-A64C-4A26-A74E-DB2F65E94F6B}" type="presParOf" srcId="{A8D63B1A-1E75-44CB-B8CF-26E7093136F3}" destId="{625DC17F-875A-40A5-B324-FB856848FE2C}" srcOrd="1" destOrd="0" presId="urn:microsoft.com/office/officeart/2005/8/layout/vList3"/>
   </dgm:cxnLst>
   <dgm:bg/>
   <dgm:whole/>
@@ -5293,8 +5345,8 @@
       </dsp:nvSpPr>
       <dsp:spPr>
         <a:xfrm>
-          <a:off x="884591" y="617"/>
-          <a:ext cx="2635407" cy="1581244"/>
+          <a:off x="529703" y="1241"/>
+          <a:ext cx="3244336" cy="1946601"/>
         </a:xfrm>
         <a:prstGeom prst="rect">
           <a:avLst/>
@@ -5357,12 +5409,12 @@
         </a:fontRef>
       </dsp:style>
       <dsp:txBody>
-        <a:bodyPr spcFirstLastPara="0" vert="horz" wrap="square" lIns="64770" tIns="64770" rIns="64770" bIns="64770" numCol="1" spcCol="1270" anchor="ctr" anchorCtr="0">
+        <a:bodyPr spcFirstLastPara="0" vert="horz" wrap="square" lIns="68580" tIns="68580" rIns="68580" bIns="68580" numCol="1" spcCol="1270" anchor="ctr" anchorCtr="0">
           <a:noAutofit/>
         </a:bodyPr>
         <a:lstStyle/>
         <a:p>
-          <a:pPr marL="0" lvl="0" indent="0" algn="ctr" defTabSz="755650">
+          <a:pPr marL="0" lvl="0" indent="0" algn="ctr" defTabSz="800100">
             <a:lnSpc>
               <a:spcPct val="90000"/>
             </a:lnSpc>
@@ -5375,15 +5427,51 @@
             <a:buNone/>
           </a:pPr>
           <a:r>
-            <a:rPr lang="en-US" sz="1700" b="1" kern="1200" dirty="0"/>
-            <a:t>Chart 1 Bar Chart — Direct baseline salary comparison across technical specializations.</a:t>
+            <a:rPr lang="en-US" sz="1800" b="1" kern="1200" dirty="0"/>
+            <a:t>Chart 1 Bar charts</a:t>
           </a:r>
-          <a:endParaRPr lang="en-US" sz="1700" kern="1200" dirty="0"/>
+        </a:p>
+        <a:p>
+          <a:pPr marL="0" lvl="0" indent="0" algn="ctr" defTabSz="800100">
+            <a:lnSpc>
+              <a:spcPct val="90000"/>
+            </a:lnSpc>
+            <a:spcBef>
+              <a:spcPct val="0"/>
+            </a:spcBef>
+            <a:spcAft>
+              <a:spcPct val="35000"/>
+            </a:spcAft>
+            <a:buNone/>
+          </a:pPr>
+          <a:r>
+            <a:rPr lang="en-US" sz="1800" b="1" kern="1200" dirty="0"/>
+            <a:t> (Macro &amp; Micro) — </a:t>
+          </a:r>
+        </a:p>
+        <a:p>
+          <a:pPr marL="0" lvl="0" indent="0" algn="ctr" defTabSz="800100">
+            <a:lnSpc>
+              <a:spcPct val="90000"/>
+            </a:lnSpc>
+            <a:spcBef>
+              <a:spcPct val="0"/>
+            </a:spcBef>
+            <a:spcAft>
+              <a:spcPct val="35000"/>
+            </a:spcAft>
+            <a:buNone/>
+          </a:pPr>
+          <a:r>
+            <a:rPr lang="en-US" sz="1800" b="1" kern="1200" dirty="0"/>
+            <a:t>Direct baseline salary comparison across broad and specific  specializations</a:t>
+          </a:r>
+          <a:endParaRPr lang="en-US" sz="1800" kern="1200" dirty="0"/>
         </a:p>
       </dsp:txBody>
       <dsp:txXfrm>
-        <a:off x="884591" y="617"/>
-        <a:ext cx="2635407" cy="1581244"/>
+        <a:off x="529703" y="1241"/>
+        <a:ext cx="3244336" cy="1946601"/>
       </dsp:txXfrm>
     </dsp:sp>
     <dsp:sp modelId="{6DD9BC09-5125-446E-B501-50A2887C8596}">
@@ -5393,8 +5481,8 @@
       </dsp:nvSpPr>
       <dsp:spPr>
         <a:xfrm>
-          <a:off x="3783539" y="617"/>
-          <a:ext cx="2635407" cy="1581244"/>
+          <a:off x="4098472" y="1241"/>
+          <a:ext cx="3244336" cy="1946601"/>
         </a:xfrm>
         <a:prstGeom prst="rect">
           <a:avLst/>
@@ -5457,12 +5545,12 @@
         </a:fontRef>
       </dsp:style>
       <dsp:txBody>
-        <a:bodyPr spcFirstLastPara="0" vert="horz" wrap="square" lIns="64770" tIns="64770" rIns="64770" bIns="64770" numCol="1" spcCol="1270" anchor="ctr" anchorCtr="0">
+        <a:bodyPr spcFirstLastPara="0" vert="horz" wrap="square" lIns="68580" tIns="68580" rIns="68580" bIns="68580" numCol="1" spcCol="1270" anchor="ctr" anchorCtr="0">
           <a:noAutofit/>
         </a:bodyPr>
         <a:lstStyle/>
         <a:p>
-          <a:pPr marL="0" lvl="0" indent="0" algn="ctr" defTabSz="755650">
+          <a:pPr marL="0" lvl="0" indent="0" algn="ctr" defTabSz="800100">
             <a:lnSpc>
               <a:spcPct val="90000"/>
             </a:lnSpc>
@@ -5475,15 +5563,15 @@
             <a:buNone/>
           </a:pPr>
           <a:r>
-            <a:rPr lang="en-US" sz="1700" b="1" kern="1200" dirty="0"/>
-            <a:t>Chart 2 Box Plots — Distributional analysis revealing the income ceilings by role.</a:t>
+            <a:rPr lang="en-US" sz="1800" b="1" kern="1200" dirty="0"/>
+            <a:t>Chart 2 Box Plots  Distributional analysis revealing income ceilings by role</a:t>
           </a:r>
-          <a:endParaRPr lang="en-US" sz="1700" kern="1200" dirty="0"/>
+          <a:endParaRPr lang="en-US" sz="1800" kern="1200" dirty="0"/>
         </a:p>
       </dsp:txBody>
       <dsp:txXfrm>
-        <a:off x="3783539" y="617"/>
-        <a:ext cx="2635407" cy="1581244"/>
+        <a:off x="4098472" y="1241"/>
+        <a:ext cx="3244336" cy="1946601"/>
       </dsp:txXfrm>
     </dsp:sp>
     <dsp:sp modelId="{4E0A92B7-2148-4C6F-A3C6-0BC82C8DDFDE}">
@@ -5493,8 +5581,8 @@
       </dsp:nvSpPr>
       <dsp:spPr>
         <a:xfrm>
-          <a:off x="884591" y="1845402"/>
-          <a:ext cx="2635407" cy="1581244"/>
+          <a:off x="529703" y="2272276"/>
+          <a:ext cx="3244336" cy="1946601"/>
         </a:xfrm>
         <a:prstGeom prst="rect">
           <a:avLst/>
@@ -5557,12 +5645,12 @@
         </a:fontRef>
       </dsp:style>
       <dsp:txBody>
-        <a:bodyPr spcFirstLastPara="0" vert="horz" wrap="square" lIns="64770" tIns="64770" rIns="64770" bIns="64770" numCol="1" spcCol="1270" anchor="ctr" anchorCtr="0">
+        <a:bodyPr spcFirstLastPara="0" vert="horz" wrap="square" lIns="68580" tIns="68580" rIns="68580" bIns="68580" numCol="1" spcCol="1270" anchor="ctr" anchorCtr="0">
           <a:noAutofit/>
         </a:bodyPr>
         <a:lstStyle/>
         <a:p>
-          <a:pPr marL="0" lvl="0" indent="0" algn="ctr" defTabSz="755650">
+          <a:pPr marL="0" lvl="0" indent="0" algn="ctr" defTabSz="800100">
             <a:lnSpc>
               <a:spcPct val="90000"/>
             </a:lnSpc>
@@ -5575,15 +5663,33 @@
             <a:buNone/>
           </a:pPr>
           <a:r>
-            <a:rPr lang="en-US" sz="1700" b="1" kern="1200" dirty="0"/>
-            <a:t>Chart 3 Dot Plot —geographic salary variation highlighting the top tech hubs.</a:t>
+            <a:rPr lang="en-US" sz="1800" b="1" kern="1200" dirty="0"/>
+            <a:t>Chart 3 Dot Plot</a:t>
           </a:r>
-          <a:endParaRPr lang="en-US" sz="1700" kern="1200" dirty="0"/>
+        </a:p>
+        <a:p>
+          <a:pPr marL="0" lvl="0" indent="0" algn="ctr" defTabSz="800100">
+            <a:lnSpc>
+              <a:spcPct val="90000"/>
+            </a:lnSpc>
+            <a:spcBef>
+              <a:spcPct val="0"/>
+            </a:spcBef>
+            <a:spcAft>
+              <a:spcPct val="35000"/>
+            </a:spcAft>
+            <a:buNone/>
+          </a:pPr>
+          <a:r>
+            <a:rPr lang="en-US" sz="1800" b="1" kern="1200" dirty="0"/>
+            <a:t>Geographic salary variation highlighting the top tech hubs</a:t>
+          </a:r>
+          <a:endParaRPr lang="en-US" sz="1800" kern="1200" dirty="0"/>
         </a:p>
       </dsp:txBody>
       <dsp:txXfrm>
-        <a:off x="884591" y="1845402"/>
-        <a:ext cx="2635407" cy="1581244"/>
+        <a:off x="529703" y="2272276"/>
+        <a:ext cx="3244336" cy="1946601"/>
       </dsp:txXfrm>
     </dsp:sp>
     <dsp:sp modelId="{882E2E22-A670-4E16-AA2C-01FF6EBF1AA6}">
@@ -5593,8 +5699,8 @@
       </dsp:nvSpPr>
       <dsp:spPr>
         <a:xfrm>
-          <a:off x="3783539" y="1845402"/>
-          <a:ext cx="2635407" cy="1581244"/>
+          <a:off x="4139643" y="2273035"/>
+          <a:ext cx="3244336" cy="1946601"/>
         </a:xfrm>
         <a:prstGeom prst="rect">
           <a:avLst/>
@@ -5657,12 +5763,12 @@
         </a:fontRef>
       </dsp:style>
       <dsp:txBody>
-        <a:bodyPr spcFirstLastPara="0" vert="horz" wrap="square" lIns="64770" tIns="64770" rIns="64770" bIns="64770" numCol="1" spcCol="1270" anchor="ctr" anchorCtr="0">
+        <a:bodyPr spcFirstLastPara="0" vert="horz" wrap="square" lIns="68580" tIns="68580" rIns="68580" bIns="68580" numCol="1" spcCol="1270" anchor="ctr" anchorCtr="0">
           <a:noAutofit/>
         </a:bodyPr>
         <a:lstStyle/>
         <a:p>
-          <a:pPr marL="0" lvl="0" indent="0" algn="ctr" defTabSz="755650">
+          <a:pPr marL="0" lvl="0" indent="0" algn="ctr" defTabSz="800100">
             <a:lnSpc>
               <a:spcPct val="90000"/>
             </a:lnSpc>
@@ -5675,23 +5781,33 @@
             <a:buNone/>
           </a:pPr>
           <a:r>
-            <a:rPr lang="en-US" sz="1700" b="1" kern="1200" dirty="0"/>
-            <a:t>Chart 3 Range Plot — </a:t>
+            <a:rPr lang="en-US" sz="1800" b="1" kern="1200" dirty="0"/>
+            <a:t>Chart 3 Range Plot </a:t>
           </a:r>
+        </a:p>
+        <a:p>
+          <a:pPr marL="0" lvl="0" indent="0" algn="ctr" defTabSz="800100">
+            <a:lnSpc>
+              <a:spcPct val="90000"/>
+            </a:lnSpc>
+            <a:spcBef>
+              <a:spcPct val="0"/>
+            </a:spcBef>
+            <a:spcAft>
+              <a:spcPct val="35000"/>
+            </a:spcAft>
+            <a:buNone/>
+          </a:pPr>
           <a:r>
-            <a:rPr lang="en-US" sz="1700" b="1" kern="1200" dirty="0" err="1"/>
-            <a:t>Statedistribution</a:t>
+            <a:rPr lang="en-US" sz="1800" b="1" kern="1200" dirty="0"/>
+            <a:t> State distribution ceilings and the ultimate compensation multiplier</a:t>
           </a:r>
-          <a:r>
-            <a:rPr lang="en-US" sz="1700" b="1" kern="1200" dirty="0"/>
-            <a:t> ceilings and the ultimate compensation multiplier.</a:t>
-          </a:r>
-          <a:endParaRPr lang="en-US" sz="1700" kern="1200" dirty="0"/>
+          <a:endParaRPr lang="en-US" sz="1800" kern="1200" dirty="0"/>
         </a:p>
       </dsp:txBody>
       <dsp:txXfrm>
-        <a:off x="3783539" y="1845402"/>
-        <a:ext cx="2635407" cy="1581244"/>
+        <a:off x="4139643" y="2273035"/>
+        <a:ext cx="3244336" cy="1946601"/>
       </dsp:txXfrm>
     </dsp:sp>
   </dsp:spTree>
@@ -5754,17 +5870,17 @@
       <dsp:cNvGrpSpPr/>
     </dsp:nvGrpSpPr>
     <dsp:grpSpPr/>
-    <dsp:sp modelId="{33764060-0E97-40DE-8807-09B074598153}">
+    <dsp:sp modelId="{B6E23937-A962-4B3C-B42E-EB9206D00CA9}">
       <dsp:nvSpPr>
         <dsp:cNvPr id="0" name=""/>
         <dsp:cNvSpPr/>
       </dsp:nvSpPr>
       <dsp:spPr>
-        <a:xfrm>
-          <a:off x="884591" y="617"/>
-          <a:ext cx="2635407" cy="1581244"/>
+        <a:xfrm rot="10800000">
+          <a:off x="546401" y="1780"/>
+          <a:ext cx="7240874" cy="1044035"/>
         </a:xfrm>
-        <a:prstGeom prst="rect">
+        <a:prstGeom prst="homePlate">
           <a:avLst/>
         </a:prstGeom>
         <a:gradFill rotWithShape="0">
@@ -5809,6 +5925,14 @@
           <a:noFill/>
         </a:ln>
         <a:effectLst/>
+        <a:scene3d>
+          <a:camera prst="orthographicFront"/>
+          <a:lightRig rig="flat" dir="t"/>
+        </a:scene3d>
+        <a:sp3d prstMaterial="plastic">
+          <a:bevelT w="120900" h="88900"/>
+          <a:bevelB w="88900" h="31750" prst="angle"/>
+        </a:sp3d>
       </dsp:spPr>
       <dsp:style>
         <a:lnRef idx="0">
@@ -5825,12 +5949,12 @@
         </a:fontRef>
       </dsp:style>
       <dsp:txBody>
-        <a:bodyPr spcFirstLastPara="0" vert="horz" wrap="square" lIns="64770" tIns="64770" rIns="64770" bIns="64770" numCol="1" spcCol="1270" anchor="ctr" anchorCtr="0">
+        <a:bodyPr spcFirstLastPara="0" vert="horz" wrap="square" lIns="202879" tIns="60960" rIns="113792" bIns="60960" numCol="1" spcCol="1270" anchor="ctr" anchorCtr="0">
           <a:noAutofit/>
         </a:bodyPr>
         <a:lstStyle/>
         <a:p>
-          <a:pPr marL="0" lvl="0" indent="0" algn="ctr" defTabSz="755650">
+          <a:pPr marL="0" lvl="0" indent="0" algn="ctr" defTabSz="711200">
             <a:lnSpc>
               <a:spcPct val="90000"/>
             </a:lnSpc>
@@ -5843,28 +5967,140 @@
             <a:buNone/>
           </a:pPr>
           <a:r>
-            <a:rPr lang="en-US" sz="1700" b="1" kern="1200" dirty="0"/>
-            <a:t>Chart 1 Bar Chart — Direct baseline salary comparison across technical specializations.</a:t>
+            <a:rPr lang="en-US" sz="1600" b="1" kern="1200" dirty="0"/>
+            <a:t>Specialization Floor:</a:t>
           </a:r>
-          <a:endParaRPr lang="en-US" sz="1700" kern="1200" dirty="0"/>
+          <a:r>
+            <a:rPr lang="en-US" sz="1600" kern="1200" dirty="0"/>
+            <a:t> Analytics serves as the baseline. Moving into higher macro-roles (Data Science/Engineering) adds $65k, driven by titles like </a:t>
+          </a:r>
+          <a:r>
+            <a:rPr lang="en-US" sz="1600" i="1" kern="1200" dirty="0"/>
+            <a:t>Data Architect</a:t>
+          </a:r>
+          <a:r>
+            <a:rPr lang="en-US" sz="1600" kern="1200" dirty="0"/>
+            <a:t> and </a:t>
+          </a:r>
+          <a:r>
+            <a:rPr lang="en-US" sz="1600" kern="1200" dirty="0" err="1"/>
+            <a:t>ML</a:t>
+          </a:r>
+          <a:r>
+            <a:rPr lang="en-US" sz="1600" i="1" kern="1200" dirty="0" err="1"/>
+            <a:t>Engineer</a:t>
+          </a:r>
+          <a:r>
+            <a:rPr lang="en-US" sz="1600" kern="1200" dirty="0"/>
+            <a:t> which push base averages past $</a:t>
+          </a:r>
+          <a:r>
+            <a:rPr lang="en-US" sz="1600" b="1" kern="1200" dirty="0"/>
+            <a:t>160,000</a:t>
+          </a:r>
+          <a:endParaRPr lang="en-US" sz="1600" b="1" kern="1200" dirty="0">
+            <a:solidFill>
+              <a:srgbClr val="FFFFFF"/>
+            </a:solidFill>
+          </a:endParaRPr>
         </a:p>
       </dsp:txBody>
-      <dsp:txXfrm>
-        <a:off x="884591" y="617"/>
-        <a:ext cx="2635407" cy="1581244"/>
+      <dsp:txXfrm rot="10800000">
+        <a:off x="807410" y="1780"/>
+        <a:ext cx="6979865" cy="1044035"/>
       </dsp:txXfrm>
     </dsp:sp>
-    <dsp:sp modelId="{6DD9BC09-5125-446E-B501-50A2887C8596}">
+    <dsp:sp modelId="{266E6180-6C81-4895-80FC-EF5058230934}">
       <dsp:nvSpPr>
         <dsp:cNvPr id="0" name=""/>
         <dsp:cNvSpPr/>
       </dsp:nvSpPr>
       <dsp:spPr>
         <a:xfrm>
-          <a:off x="3783539" y="617"/>
-          <a:ext cx="2635407" cy="1581244"/>
+          <a:off x="51943" y="214922"/>
+          <a:ext cx="847690" cy="772216"/>
         </a:xfrm>
-        <a:prstGeom prst="rect">
+        <a:prstGeom prst="ellipse">
+          <a:avLst/>
+        </a:prstGeom>
+        <a:gradFill rotWithShape="0">
+          <a:gsLst>
+            <a:gs pos="0">
+              <a:schemeClr val="accent2">
+                <a:tint val="50000"/>
+                <a:hueOff val="0"/>
+                <a:satOff val="0"/>
+                <a:lumOff val="0"/>
+                <a:alphaOff val="0"/>
+                <a:satMod val="103000"/>
+                <a:lumMod val="102000"/>
+                <a:tint val="94000"/>
+              </a:schemeClr>
+            </a:gs>
+            <a:gs pos="50000">
+              <a:schemeClr val="accent2">
+                <a:tint val="50000"/>
+                <a:hueOff val="0"/>
+                <a:satOff val="0"/>
+                <a:lumOff val="0"/>
+                <a:alphaOff val="0"/>
+                <a:satMod val="110000"/>
+                <a:lumMod val="100000"/>
+                <a:shade val="100000"/>
+              </a:schemeClr>
+            </a:gs>
+            <a:gs pos="100000">
+              <a:schemeClr val="accent2">
+                <a:tint val="50000"/>
+                <a:hueOff val="0"/>
+                <a:satOff val="0"/>
+                <a:lumOff val="0"/>
+                <a:alphaOff val="0"/>
+                <a:lumMod val="99000"/>
+                <a:satMod val="120000"/>
+                <a:shade val="78000"/>
+              </a:schemeClr>
+            </a:gs>
+          </a:gsLst>
+          <a:lin ang="5400000" scaled="0"/>
+        </a:gradFill>
+        <a:ln>
+          <a:noFill/>
+        </a:ln>
+        <a:effectLst/>
+        <a:scene3d>
+          <a:camera prst="orthographicFront"/>
+          <a:lightRig rig="flat" dir="t"/>
+        </a:scene3d>
+        <a:sp3d z="127000" prstMaterial="plastic">
+          <a:bevelT w="88900" h="88900"/>
+          <a:bevelB w="88900" h="31750" prst="angle"/>
+        </a:sp3d>
+      </dsp:spPr>
+      <dsp:style>
+        <a:lnRef idx="0">
+          <a:scrgbClr r="0" g="0" b="0"/>
+        </a:lnRef>
+        <a:fillRef idx="3">
+          <a:scrgbClr r="0" g="0" b="0"/>
+        </a:fillRef>
+        <a:effectRef idx="2">
+          <a:scrgbClr r="0" g="0" b="0"/>
+        </a:effectRef>
+        <a:fontRef idx="minor"/>
+      </dsp:style>
+    </dsp:sp>
+    <dsp:sp modelId="{12BA3B4B-527F-45AE-B6CD-064895B0BBCF}">
+      <dsp:nvSpPr>
+        <dsp:cNvPr id="0" name=""/>
+        <dsp:cNvSpPr/>
+      </dsp:nvSpPr>
+      <dsp:spPr>
+        <a:xfrm rot="10800000">
+          <a:off x="367980" y="1183150"/>
+          <a:ext cx="7597717" cy="1248220"/>
+        </a:xfrm>
+        <a:prstGeom prst="homePlate">
           <a:avLst/>
         </a:prstGeom>
         <a:gradFill rotWithShape="0">
@@ -5909,6 +6145,14 @@
           <a:noFill/>
         </a:ln>
         <a:effectLst/>
+        <a:scene3d>
+          <a:camera prst="orthographicFront"/>
+          <a:lightRig rig="flat" dir="t"/>
+        </a:scene3d>
+        <a:sp3d prstMaterial="plastic">
+          <a:bevelT w="120900" h="88900"/>
+          <a:bevelB w="88900" h="31750" prst="angle"/>
+        </a:sp3d>
       </dsp:spPr>
       <dsp:style>
         <a:lnRef idx="0">
@@ -5925,12 +6169,12 @@
         </a:fontRef>
       </dsp:style>
       <dsp:txBody>
-        <a:bodyPr spcFirstLastPara="0" vert="horz" wrap="square" lIns="64770" tIns="64770" rIns="64770" bIns="64770" numCol="1" spcCol="1270" anchor="ctr" anchorCtr="0">
+        <a:bodyPr spcFirstLastPara="0" vert="horz" wrap="square" lIns="202879" tIns="68580" rIns="128016" bIns="68580" numCol="1" spcCol="1270" anchor="ctr" anchorCtr="0">
           <a:noAutofit/>
         </a:bodyPr>
         <a:lstStyle/>
         <a:p>
-          <a:pPr marL="0" lvl="0" indent="0" algn="ctr" defTabSz="755650">
+          <a:pPr marL="0" lvl="0" indent="0" algn="ctr" defTabSz="800100">
             <a:lnSpc>
               <a:spcPct val="90000"/>
             </a:lnSpc>
@@ -5943,28 +6187,124 @@
             <a:buNone/>
           </a:pPr>
           <a:r>
-            <a:rPr lang="en-US" sz="1700" b="1" kern="1200" dirty="0"/>
-            <a:t>Chart 2 Box Plots — Distributional analysis revealing the income ceilings by role.</a:t>
+            <a:rPr lang="en-US" sz="1800" b="1" kern="1200" dirty="0"/>
+            <a:t>Geographic Multiplier:</a:t>
           </a:r>
-          <a:endParaRPr lang="en-US" sz="1700" kern="1200" dirty="0"/>
+          <a:r>
+            <a:rPr lang="en-US" sz="1800" kern="1200" dirty="0"/>
+            <a:t> Geography acts as a rigid multiplier. Audited government tax data proves that coastal hubs (California, Washington, Massachusetts) shift the entire baseline </a:t>
+          </a:r>
+          <a:r>
+            <a:rPr lang="en-US" sz="1800" b="1" kern="1200" dirty="0"/>
+            <a:t>$25,000+</a:t>
+          </a:r>
+          <a:r>
+            <a:rPr lang="en-US" sz="1800" kern="1200" dirty="0"/>
+            <a:t> above the national average</a:t>
+          </a:r>
+          <a:endParaRPr lang="en-US" sz="1800" kern="1200" dirty="0">
+            <a:solidFill>
+              <a:srgbClr val="FFFFFF"/>
+            </a:solidFill>
+          </a:endParaRPr>
         </a:p>
       </dsp:txBody>
-      <dsp:txXfrm>
-        <a:off x="3783539" y="617"/>
-        <a:ext cx="2635407" cy="1581244"/>
+      <dsp:txXfrm rot="10800000">
+        <a:off x="680035" y="1183150"/>
+        <a:ext cx="7285662" cy="1248220"/>
       </dsp:txXfrm>
     </dsp:sp>
-    <dsp:sp modelId="{4E0A92B7-2148-4C6F-A3C6-0BC82C8DDFDE}">
+    <dsp:sp modelId="{8372195C-9932-4571-9241-3BD0E9226CD7}">
       <dsp:nvSpPr>
         <dsp:cNvPr id="0" name=""/>
         <dsp:cNvSpPr/>
       </dsp:nvSpPr>
       <dsp:spPr>
         <a:xfrm>
-          <a:off x="884591" y="1845402"/>
-          <a:ext cx="2635407" cy="1581244"/>
+          <a:off x="48212" y="1537120"/>
+          <a:ext cx="863719" cy="726057"/>
         </a:xfrm>
-        <a:prstGeom prst="rect">
+        <a:prstGeom prst="ellipse">
+          <a:avLst/>
+        </a:prstGeom>
+        <a:gradFill rotWithShape="0">
+          <a:gsLst>
+            <a:gs pos="0">
+              <a:schemeClr val="accent2">
+                <a:tint val="50000"/>
+                <a:hueOff val="0"/>
+                <a:satOff val="0"/>
+                <a:lumOff val="0"/>
+                <a:alphaOff val="0"/>
+                <a:satMod val="103000"/>
+                <a:lumMod val="102000"/>
+                <a:tint val="94000"/>
+              </a:schemeClr>
+            </a:gs>
+            <a:gs pos="50000">
+              <a:schemeClr val="accent2">
+                <a:tint val="50000"/>
+                <a:hueOff val="0"/>
+                <a:satOff val="0"/>
+                <a:lumOff val="0"/>
+                <a:alphaOff val="0"/>
+                <a:satMod val="110000"/>
+                <a:lumMod val="100000"/>
+                <a:shade val="100000"/>
+              </a:schemeClr>
+            </a:gs>
+            <a:gs pos="100000">
+              <a:schemeClr val="accent2">
+                <a:tint val="50000"/>
+                <a:hueOff val="0"/>
+                <a:satOff val="0"/>
+                <a:lumOff val="0"/>
+                <a:alphaOff val="0"/>
+                <a:lumMod val="99000"/>
+                <a:satMod val="120000"/>
+                <a:shade val="78000"/>
+              </a:schemeClr>
+            </a:gs>
+          </a:gsLst>
+          <a:lin ang="5400000" scaled="0"/>
+        </a:gradFill>
+        <a:ln>
+          <a:noFill/>
+        </a:ln>
+        <a:effectLst/>
+        <a:scene3d>
+          <a:camera prst="orthographicFront"/>
+          <a:lightRig rig="flat" dir="t"/>
+        </a:scene3d>
+        <a:sp3d z="127000" prstMaterial="plastic">
+          <a:bevelT w="88900" h="88900"/>
+          <a:bevelB w="88900" h="31750" prst="angle"/>
+        </a:sp3d>
+      </dsp:spPr>
+      <dsp:style>
+        <a:lnRef idx="0">
+          <a:scrgbClr r="0" g="0" b="0"/>
+        </a:lnRef>
+        <a:fillRef idx="3">
+          <a:scrgbClr r="0" g="0" b="0"/>
+        </a:fillRef>
+        <a:effectRef idx="2">
+          <a:scrgbClr r="0" g="0" b="0"/>
+        </a:effectRef>
+        <a:fontRef idx="minor"/>
+      </dsp:style>
+    </dsp:sp>
+    <dsp:sp modelId="{625DC17F-875A-40A5-B324-FB856848FE2C}">
+      <dsp:nvSpPr>
+        <dsp:cNvPr id="0" name=""/>
+        <dsp:cNvSpPr/>
+      </dsp:nvSpPr>
+      <dsp:spPr>
+        <a:xfrm rot="10800000">
+          <a:off x="600795" y="2570486"/>
+          <a:ext cx="7140400" cy="1536141"/>
+        </a:xfrm>
+        <a:prstGeom prst="homePlate">
           <a:avLst/>
         </a:prstGeom>
         <a:gradFill rotWithShape="0">
@@ -6009,6 +6349,14 @@
           <a:noFill/>
         </a:ln>
         <a:effectLst/>
+        <a:scene3d>
+          <a:camera prst="orthographicFront"/>
+          <a:lightRig rig="flat" dir="t"/>
+        </a:scene3d>
+        <a:sp3d prstMaterial="plastic">
+          <a:bevelT w="120900" h="88900"/>
+          <a:bevelB w="88900" h="31750" prst="angle"/>
+        </a:sp3d>
       </dsp:spPr>
       <dsp:style>
         <a:lnRef idx="0">
@@ -6025,12 +6373,12 @@
         </a:fontRef>
       </dsp:style>
       <dsp:txBody>
-        <a:bodyPr spcFirstLastPara="0" vert="horz" wrap="square" lIns="64770" tIns="64770" rIns="64770" bIns="64770" numCol="1" spcCol="1270" anchor="ctr" anchorCtr="0">
+        <a:bodyPr spcFirstLastPara="0" vert="horz" wrap="square" lIns="202879" tIns="68580" rIns="128016" bIns="68580" numCol="1" spcCol="1270" anchor="ctr" anchorCtr="0">
           <a:noAutofit/>
         </a:bodyPr>
         <a:lstStyle/>
         <a:p>
-          <a:pPr marL="0" lvl="0" indent="0" algn="ctr" defTabSz="755650">
+          <a:pPr marL="0" lvl="0" indent="0" algn="ctr" defTabSz="800100">
             <a:lnSpc>
               <a:spcPct val="90000"/>
             </a:lnSpc>
@@ -6043,34 +6391,51 @@
             <a:buNone/>
           </a:pPr>
           <a:r>
-            <a:rPr lang="en-US" sz="1700" b="1" kern="1200" dirty="0"/>
-            <a:t>Chart 3 Dot Plot —geographic salary variation highlighting the top tech hubs.</a:t>
+            <a:rPr lang="en-US" sz="1800" b="1" kern="1200" dirty="0"/>
+            <a:t>Ceiling:</a:t>
           </a:r>
-          <a:endParaRPr lang="en-US" sz="1700" kern="1200" dirty="0"/>
+          <a:r>
+            <a:rPr lang="en-US" sz="1800" kern="1200" dirty="0"/>
+            <a:t> Averages hide the ceiling. High paid titles stacked within a top tier geographic market, the top 25% of practitioners break through the </a:t>
+          </a:r>
+          <a:r>
+            <a:rPr lang="en-US" sz="1800" b="1" kern="1200" dirty="0"/>
+            <a:t>$170,000 to $216,000</a:t>
+          </a:r>
+          <a:r>
+            <a:rPr lang="en-US" sz="1800" kern="1200" dirty="0"/>
+            <a:t> threshold in base pay alone</a:t>
+          </a:r>
+          <a:endParaRPr lang="en-US" sz="1800" kern="1200" dirty="0">
+            <a:solidFill>
+              <a:srgbClr val="FFFFFF"/>
+            </a:solidFill>
+          </a:endParaRPr>
         </a:p>
       </dsp:txBody>
-      <dsp:txXfrm>
-        <a:off x="884591" y="1845402"/>
-        <a:ext cx="2635407" cy="1581244"/>
+      <dsp:txXfrm rot="10800000">
+        <a:off x="984830" y="2570486"/>
+        <a:ext cx="6756365" cy="1536141"/>
       </dsp:txXfrm>
     </dsp:sp>
-    <dsp:sp modelId="{882E2E22-A670-4E16-AA2C-01FF6EBF1AA6}">
+    <dsp:sp modelId="{DA25E5E9-B0E4-4CAB-B20C-0D5119E00C2F}">
       <dsp:nvSpPr>
         <dsp:cNvPr id="0" name=""/>
         <dsp:cNvSpPr/>
       </dsp:nvSpPr>
       <dsp:spPr>
         <a:xfrm>
-          <a:off x="3783539" y="1845402"/>
-          <a:ext cx="2635407" cy="1581244"/>
+          <a:off x="160336" y="2843793"/>
+          <a:ext cx="794019" cy="741731"/>
         </a:xfrm>
-        <a:prstGeom prst="rect">
+        <a:prstGeom prst="ellipse">
           <a:avLst/>
         </a:prstGeom>
         <a:gradFill rotWithShape="0">
           <a:gsLst>
             <a:gs pos="0">
               <a:schemeClr val="accent2">
+                <a:tint val="50000"/>
                 <a:hueOff val="0"/>
                 <a:satOff val="0"/>
                 <a:lumOff val="0"/>
@@ -6082,6 +6447,7 @@
             </a:gs>
             <a:gs pos="50000">
               <a:schemeClr val="accent2">
+                <a:tint val="50000"/>
                 <a:hueOff val="0"/>
                 <a:satOff val="0"/>
                 <a:lumOff val="0"/>
@@ -6093,6 +6459,7 @@
             </a:gs>
             <a:gs pos="100000">
               <a:schemeClr val="accent2">
+                <a:tint val="50000"/>
                 <a:hueOff val="0"/>
                 <a:satOff val="0"/>
                 <a:lumOff val="0"/>
@@ -6109,6 +6476,14 @@
           <a:noFill/>
         </a:ln>
         <a:effectLst/>
+        <a:scene3d>
+          <a:camera prst="orthographicFront"/>
+          <a:lightRig rig="flat" dir="t"/>
+        </a:scene3d>
+        <a:sp3d z="127000" prstMaterial="plastic">
+          <a:bevelT w="88900" h="88900"/>
+          <a:bevelB w="88900" h="31750" prst="angle"/>
+        </a:sp3d>
       </dsp:spPr>
       <dsp:style>
         <a:lnRef idx="0">
@@ -6120,47 +6495,8 @@
         <a:effectRef idx="2">
           <a:scrgbClr r="0" g="0" b="0"/>
         </a:effectRef>
-        <a:fontRef idx="minor">
-          <a:schemeClr val="lt1"/>
-        </a:fontRef>
+        <a:fontRef idx="minor"/>
       </dsp:style>
-      <dsp:txBody>
-        <a:bodyPr spcFirstLastPara="0" vert="horz" wrap="square" lIns="64770" tIns="64770" rIns="64770" bIns="64770" numCol="1" spcCol="1270" anchor="ctr" anchorCtr="0">
-          <a:noAutofit/>
-        </a:bodyPr>
-        <a:lstStyle/>
-        <a:p>
-          <a:pPr marL="0" lvl="0" indent="0" algn="ctr" defTabSz="755650">
-            <a:lnSpc>
-              <a:spcPct val="90000"/>
-            </a:lnSpc>
-            <a:spcBef>
-              <a:spcPct val="0"/>
-            </a:spcBef>
-            <a:spcAft>
-              <a:spcPct val="35000"/>
-            </a:spcAft>
-            <a:buNone/>
-          </a:pPr>
-          <a:r>
-            <a:rPr lang="en-US" sz="1700" b="1" kern="1200" dirty="0"/>
-            <a:t>Chart 3 Range Plot — </a:t>
-          </a:r>
-          <a:r>
-            <a:rPr lang="en-US" sz="1700" b="1" kern="1200" dirty="0" err="1"/>
-            <a:t>Statedistribution</a:t>
-          </a:r>
-          <a:r>
-            <a:rPr lang="en-US" sz="1700" b="1" kern="1200" dirty="0"/>
-            <a:t> ceilings and the ultimate compensation multiplier.</a:t>
-          </a:r>
-          <a:endParaRPr lang="en-US" sz="1700" kern="1200" dirty="0"/>
-        </a:p>
-      </dsp:txBody>
-      <dsp:txXfrm>
-        <a:off x="3783539" y="1845402"/>
-        <a:ext cx="2635407" cy="1581244"/>
-      </dsp:txXfrm>
     </dsp:sp>
   </dsp:spTree>
 </dsp:drawing>
@@ -6902,39 +7238,18 @@
 </file>
 
 <file path=ppt/diagrams/layout6.xml><?xml version="1.0" encoding="utf-8"?>
-<dgm:layoutDef xmlns:dgm="http://schemas.openxmlformats.org/drawingml/2006/diagram" xmlns:a="http://schemas.openxmlformats.org/drawingml/2006/main" uniqueId="urn:microsoft.com/office/officeart/2005/8/layout/default">
+<dgm:layoutDef xmlns:dgm="http://schemas.openxmlformats.org/drawingml/2006/diagram" xmlns:a="http://schemas.openxmlformats.org/drawingml/2006/main" uniqueId="urn:microsoft.com/office/officeart/2005/8/layout/vList3">
   <dgm:title val=""/>
   <dgm:desc val=""/>
   <dgm:catLst>
-    <dgm:cat type="list" pri="400"/>
+    <dgm:cat type="list" pri="14000"/>
+    <dgm:cat type="convert" pri="3000"/>
+    <dgm:cat type="picture" pri="27000"/>
+    <dgm:cat type="pictureconvert" pri="27000"/>
   </dgm:catLst>
-  <dgm:sampData>
+  <dgm:sampData useDef="1">
     <dgm:dataModel>
-      <dgm:ptLst>
-        <dgm:pt modelId="0" type="doc"/>
-        <dgm:pt modelId="1">
-          <dgm:prSet phldr="1"/>
-        </dgm:pt>
-        <dgm:pt modelId="2">
-          <dgm:prSet phldr="1"/>
-        </dgm:pt>
-        <dgm:pt modelId="3">
-          <dgm:prSet phldr="1"/>
-        </dgm:pt>
-        <dgm:pt modelId="4">
-          <dgm:prSet phldr="1"/>
-        </dgm:pt>
-        <dgm:pt modelId="5">
-          <dgm:prSet phldr="1"/>
-        </dgm:pt>
-      </dgm:ptLst>
-      <dgm:cxnLst>
-        <dgm:cxn modelId="6" srcId="0" destId="1" srcOrd="0" destOrd="0"/>
-        <dgm:cxn modelId="7" srcId="0" destId="2" srcOrd="1" destOrd="0"/>
-        <dgm:cxn modelId="8" srcId="0" destId="3" srcOrd="2" destOrd="0"/>
-        <dgm:cxn modelId="9" srcId="0" destId="4" srcOrd="3" destOrd="0"/>
-        <dgm:cxn modelId="10" srcId="0" destId="5" srcOrd="4" destOrd="0"/>
-      </dgm:cxnLst>
+      <dgm:ptLst/>
       <dgm:bg/>
       <dgm:whole/>
     </dgm:dataModel>
@@ -6962,83 +7277,120 @@
         <dgm:pt modelId="2"/>
         <dgm:pt modelId="3"/>
         <dgm:pt modelId="4"/>
-        <dgm:pt modelId="5"/>
-        <dgm:pt modelId="6"/>
       </dgm:ptLst>
       <dgm:cxnLst>
-        <dgm:cxn modelId="7" srcId="0" destId="1" srcOrd="0" destOrd="0"/>
-        <dgm:cxn modelId="8" srcId="0" destId="2" srcOrd="1" destOrd="0"/>
-        <dgm:cxn modelId="9" srcId="0" destId="3" srcOrd="2" destOrd="0"/>
-        <dgm:cxn modelId="10" srcId="0" destId="4" srcOrd="3" destOrd="0"/>
-        <dgm:cxn modelId="11" srcId="0" destId="5" srcOrd="4" destOrd="0"/>
-        <dgm:cxn modelId="12" srcId="0" destId="6" srcOrd="5" destOrd="0"/>
+        <dgm:cxn modelId="5" srcId="0" destId="1" srcOrd="0" destOrd="0"/>
+        <dgm:cxn modelId="6" srcId="0" destId="2" srcOrd="1" destOrd="0"/>
+        <dgm:cxn modelId="7" srcId="0" destId="3" srcOrd="2" destOrd="0"/>
+        <dgm:cxn modelId="8" srcId="0" destId="4" srcOrd="3" destOrd="0"/>
       </dgm:cxnLst>
       <dgm:bg/>
       <dgm:whole/>
     </dgm:dataModel>
   </dgm:clrData>
-  <dgm:layoutNode name="diagram">
+  <dgm:layoutNode name="linearFlow">
     <dgm:varLst>
       <dgm:dir/>
       <dgm:resizeHandles val="exact"/>
     </dgm:varLst>
-    <dgm:choose name="Name0">
-      <dgm:if name="Name1" func="var" arg="dir" op="equ" val="norm">
-        <dgm:alg type="snake">
-          <dgm:param type="grDir" val="tL"/>
-          <dgm:param type="flowDir" val="row"/>
-          <dgm:param type="contDir" val="sameDir"/>
-          <dgm:param type="off" val="ctr"/>
-        </dgm:alg>
-      </dgm:if>
-      <dgm:else name="Name2">
-        <dgm:alg type="snake">
-          <dgm:param type="grDir" val="tR"/>
-          <dgm:param type="flowDir" val="row"/>
-          <dgm:param type="contDir" val="sameDir"/>
-          <dgm:param type="off" val="ctr"/>
-        </dgm:alg>
-      </dgm:else>
-    </dgm:choose>
+    <dgm:alg type="lin">
+      <dgm:param type="linDir" val="fromT"/>
+      <dgm:param type="vertAlign" val="mid"/>
+      <dgm:param type="horzAlign" val="ctr"/>
+    </dgm:alg>
     <dgm:shape xmlns:r="http://schemas.openxmlformats.org/officeDocument/2006/relationships" r:blip="">
       <dgm:adjLst/>
     </dgm:shape>
     <dgm:presOf/>
     <dgm:constrLst>
-      <dgm:constr type="w" for="ch" forName="node" refType="w"/>
-      <dgm:constr type="h" for="ch" forName="node" refType="w" refFor="ch" refForName="node" fact="0.6"/>
-      <dgm:constr type="w" for="ch" forName="sibTrans" refType="w" refFor="ch" refForName="node" fact="0.1"/>
-      <dgm:constr type="sp" refType="w" refFor="ch" refForName="sibTrans"/>
-      <dgm:constr type="primFontSz" for="ch" forName="node" op="equ" val="65"/>
+      <dgm:constr type="w" for="ch" forName="composite" refType="w"/>
+      <dgm:constr type="h" for="ch" forName="composite" refType="h"/>
+      <dgm:constr type="h" for="ch" forName="spacing" refType="h" refFor="ch" refForName="composite" fact="0.25"/>
+      <dgm:constr type="h" for="ch" forName="spacing" refType="w" op="lte" fact="0.1"/>
+      <dgm:constr type="primFontSz" for="des" ptType="node" op="equ" val="65"/>
     </dgm:constrLst>
     <dgm:ruleLst/>
-    <dgm:forEach name="Name3" axis="ch" ptType="node">
-      <dgm:layoutNode name="node">
-        <dgm:varLst>
-          <dgm:bulletEnabled val="1"/>
-        </dgm:varLst>
-        <dgm:alg type="tx"/>
-        <dgm:shape xmlns:r="http://schemas.openxmlformats.org/officeDocument/2006/relationships" type="rect" r:blip="">
+    <dgm:forEach name="Name0" axis="ch" ptType="node">
+      <dgm:layoutNode name="composite">
+        <dgm:alg type="composite"/>
+        <dgm:shape xmlns:r="http://schemas.openxmlformats.org/officeDocument/2006/relationships" r:blip="">
           <dgm:adjLst/>
         </dgm:shape>
-        <dgm:presOf axis="desOrSelf" ptType="node"/>
-        <dgm:constrLst>
-          <dgm:constr type="lMarg" refType="primFontSz" fact="0.3"/>
-          <dgm:constr type="rMarg" refType="primFontSz" fact="0.3"/>
-          <dgm:constr type="tMarg" refType="primFontSz" fact="0.3"/>
-          <dgm:constr type="bMarg" refType="primFontSz" fact="0.3"/>
-        </dgm:constrLst>
-        <dgm:ruleLst>
-          <dgm:rule type="primFontSz" val="5" fact="NaN" max="NaN"/>
-        </dgm:ruleLst>
+        <dgm:presOf/>
+        <dgm:choose name="Name1">
+          <dgm:if name="Name2" func="var" arg="dir" op="equ" val="norm">
+            <dgm:constrLst>
+              <dgm:constr type="w" for="ch" forName="imgShp" refType="w" fact="0.335"/>
+              <dgm:constr type="h" for="ch" forName="imgShp" refType="w" refFor="ch" refForName="imgShp" op="equ"/>
+              <dgm:constr type="h" for="ch" forName="imgShp" refType="h" op="lte"/>
+              <dgm:constr type="ctrY" for="ch" forName="imgShp" refType="h" fact="0.5"/>
+              <dgm:constr type="l" for="ch" forName="imgShp"/>
+              <dgm:constr type="w" for="ch" forName="txShp" refType="w" op="equ" fact="0.665"/>
+              <dgm:constr type="h" for="ch" forName="txShp" refType="h" refFor="ch" refForName="imgShp" op="equ"/>
+              <dgm:constr type="ctrY" for="ch" forName="txShp" refType="h" fact="0.5"/>
+              <dgm:constr type="l" for="ch" forName="txShp" refType="w" refFor="ch" refForName="imgShp" fact="0.5"/>
+              <dgm:constr type="lMarg" for="ch" forName="txShp" refType="w" refFor="ch" refForName="imgShp" fact="1.25"/>
+            </dgm:constrLst>
+          </dgm:if>
+          <dgm:else name="Name3">
+            <dgm:constrLst>
+              <dgm:constr type="w" for="ch" forName="imgShp" refType="w" fact="0.335"/>
+              <dgm:constr type="h" for="ch" forName="imgShp" refType="w" refFor="ch" refForName="imgShp" op="equ"/>
+              <dgm:constr type="h" for="ch" forName="imgShp" refType="h" op="lte"/>
+              <dgm:constr type="ctrY" for="ch" forName="imgShp" refType="h" fact="0.5"/>
+              <dgm:constr type="r" for="ch" forName="imgShp" refType="w"/>
+              <dgm:constr type="w" for="ch" forName="txShp" refType="w" op="equ" fact="0.665"/>
+              <dgm:constr type="h" for="ch" forName="txShp" refType="h" refFor="ch" refForName="imgShp" op="equ"/>
+              <dgm:constr type="ctrY" for="ch" forName="txShp" refType="h" fact="0.5"/>
+              <dgm:constr type="r" for="ch" forName="txShp" refType="ctrX" refFor="ch" refForName="imgShp"/>
+              <dgm:constr type="rMarg" for="ch" forName="txShp" refType="w" refFor="ch" refForName="imgShp" fact="1.25"/>
+            </dgm:constrLst>
+          </dgm:else>
+        </dgm:choose>
+        <dgm:ruleLst/>
+        <dgm:layoutNode name="imgShp" styleLbl="fgImgPlace1">
+          <dgm:alg type="sp"/>
+          <dgm:shape xmlns:r="http://schemas.openxmlformats.org/officeDocument/2006/relationships" type="ellipse" r:blip="" blipPhldr="1">
+            <dgm:adjLst/>
+          </dgm:shape>
+          <dgm:presOf/>
+          <dgm:constrLst/>
+          <dgm:ruleLst/>
+        </dgm:layoutNode>
+        <dgm:layoutNode name="txShp">
+          <dgm:varLst>
+            <dgm:bulletEnabled val="1"/>
+          </dgm:varLst>
+          <dgm:alg type="tx"/>
+          <dgm:choose name="Name4">
+            <dgm:if name="Name5" func="var" arg="dir" op="equ" val="norm">
+              <dgm:shape xmlns:r="http://schemas.openxmlformats.org/officeDocument/2006/relationships" rot="180" type="homePlate" r:blip="" zOrderOff="-1">
+                <dgm:adjLst/>
+              </dgm:shape>
+            </dgm:if>
+            <dgm:else name="Name6">
+              <dgm:shape xmlns:r="http://schemas.openxmlformats.org/officeDocument/2006/relationships" type="homePlate" r:blip="" zOrderOff="-1">
+                <dgm:adjLst/>
+              </dgm:shape>
+            </dgm:else>
+          </dgm:choose>
+          <dgm:presOf axis="desOrSelf" ptType="node"/>
+          <dgm:constrLst>
+            <dgm:constr type="tMarg" refType="primFontSz" fact="0.3"/>
+            <dgm:constr type="bMarg" refType="primFontSz" fact="0.3"/>
+          </dgm:constrLst>
+          <dgm:ruleLst>
+            <dgm:rule type="primFontSz" val="5" fact="NaN" max="NaN"/>
+          </dgm:ruleLst>
+        </dgm:layoutNode>
       </dgm:layoutNode>
-      <dgm:forEach name="Name4" axis="followSib" ptType="sibTrans" cnt="1">
-        <dgm:layoutNode name="sibTrans">
+      <dgm:forEach name="Name7" axis="followSib" ptType="sibTrans" cnt="1">
+        <dgm:layoutNode name="spacing">
           <dgm:alg type="sp"/>
           <dgm:shape xmlns:r="http://schemas.openxmlformats.org/officeDocument/2006/relationships" r:blip="">
             <dgm:adjLst/>
           </dgm:shape>
-          <dgm:presOf/>
+          <dgm:presOf axis="self"/>
           <dgm:constrLst/>
           <dgm:ruleLst/>
         </dgm:layoutNode>
@@ -12219,11 +12571,11 @@
 </file>
 
 <file path=ppt/diagrams/quickStyle6.xml><?xml version="1.0" encoding="utf-8"?>
-<dgm:styleDef xmlns:dgm="http://schemas.openxmlformats.org/drawingml/2006/diagram" xmlns:a="http://schemas.openxmlformats.org/drawingml/2006/main" uniqueId="urn:microsoft.com/office/officeart/2005/8/quickstyle/simple4">
+<dgm:styleDef xmlns:dgm="http://schemas.openxmlformats.org/drawingml/2006/diagram" xmlns:a="http://schemas.openxmlformats.org/drawingml/2006/main" uniqueId="urn:microsoft.com/office/officeart/2005/8/quickstyle/3d1">
   <dgm:title val=""/>
   <dgm:desc val=""/>
   <dgm:catLst>
-    <dgm:cat type="simple" pri="10400"/>
+    <dgm:cat type="3D" pri="11100"/>
   </dgm:catLst>
   <dgm:scene3d>
     <a:camera prst="orthographicFront"/>
@@ -12232,9 +12584,12 @@
   <dgm:styleLbl name="node0">
     <dgm:scene3d>
       <a:camera prst="orthographicFront"/>
-      <a:lightRig rig="threePt" dir="t"/>
+      <a:lightRig rig="flat" dir="t"/>
     </dgm:scene3d>
-    <dgm:sp3d/>
+    <dgm:sp3d prstMaterial="plastic">
+      <a:bevelT w="120900" h="88900"/>
+      <a:bevelB w="88900" h="31750" prst="angle"/>
+    </dgm:sp3d>
     <dgm:txPr/>
     <dgm:style>
       <a:lnRef idx="0">
@@ -12254,18 +12609,21 @@
   <dgm:styleLbl name="lnNode1">
     <dgm:scene3d>
       <a:camera prst="orthographicFront"/>
-      <a:lightRig rig="threePt" dir="t"/>
+      <a:lightRig rig="flat" dir="t"/>
     </dgm:scene3d>
-    <dgm:sp3d/>
+    <dgm:sp3d prstMaterial="plastic">
+      <a:bevelT w="120900" h="88900"/>
+      <a:bevelB w="88900" h="31750" prst="angle"/>
+    </dgm:sp3d>
     <dgm:txPr/>
     <dgm:style>
-      <a:lnRef idx="1">
+      <a:lnRef idx="0">
         <a:scrgbClr r="0" g="0" b="0"/>
       </a:lnRef>
       <a:fillRef idx="3">
         <a:scrgbClr r="0" g="0" b="0"/>
       </a:fillRef>
-      <a:effectRef idx="2">
+      <a:effectRef idx="1">
         <a:scrgbClr r="0" g="0" b="0"/>
       </a:effectRef>
       <a:fontRef idx="minor">
@@ -12276,18 +12634,21 @@
   <dgm:styleLbl name="vennNode1">
     <dgm:scene3d>
       <a:camera prst="orthographicFront"/>
-      <a:lightRig rig="threePt" dir="t"/>
+      <a:lightRig rig="flat" dir="t"/>
     </dgm:scene3d>
-    <dgm:sp3d/>
+    <dgm:sp3d prstMaterial="plastic">
+      <a:bevelT w="120900" h="88900"/>
+      <a:bevelB w="88900" h="31750" prst="angle"/>
+    </dgm:sp3d>
     <dgm:txPr/>
     <dgm:style>
       <a:lnRef idx="0">
         <a:scrgbClr r="0" g="0" b="0"/>
       </a:lnRef>
-      <a:fillRef idx="3">
+      <a:fillRef idx="1">
         <a:scrgbClr r="0" g="0" b="0"/>
       </a:fillRef>
-      <a:effectRef idx="0">
+      <a:effectRef idx="1">
         <a:scrgbClr r="0" g="0" b="0"/>
       </a:effectRef>
       <a:fontRef idx="minor">
@@ -12298,9 +12659,12 @@
   <dgm:styleLbl name="alignNode1">
     <dgm:scene3d>
       <a:camera prst="orthographicFront"/>
-      <a:lightRig rig="threePt" dir="t"/>
+      <a:lightRig rig="flat" dir="t"/>
     </dgm:scene3d>
-    <dgm:sp3d/>
+    <dgm:sp3d prstMaterial="plastic">
+      <a:bevelT w="120900" h="88900"/>
+      <a:bevelB w="88900" h="31750" prst="angle"/>
+    </dgm:sp3d>
     <dgm:txPr/>
     <dgm:style>
       <a:lnRef idx="1">
@@ -12320,9 +12684,12 @@
   <dgm:styleLbl name="node1">
     <dgm:scene3d>
       <a:camera prst="orthographicFront"/>
-      <a:lightRig rig="threePt" dir="t"/>
+      <a:lightRig rig="flat" dir="t"/>
     </dgm:scene3d>
-    <dgm:sp3d/>
+    <dgm:sp3d prstMaterial="plastic">
+      <a:bevelT w="120900" h="88900"/>
+      <a:bevelB w="88900" h="31750" prst="angle"/>
+    </dgm:sp3d>
     <dgm:txPr/>
     <dgm:style>
       <a:lnRef idx="0">
@@ -12342,9 +12709,12 @@
   <dgm:styleLbl name="node2">
     <dgm:scene3d>
       <a:camera prst="orthographicFront"/>
-      <a:lightRig rig="threePt" dir="t"/>
+      <a:lightRig rig="flat" dir="t"/>
     </dgm:scene3d>
-    <dgm:sp3d/>
+    <dgm:sp3d prstMaterial="plastic">
+      <a:bevelT w="120900" h="88900"/>
+      <a:bevelB w="88900" h="31750" prst="angle"/>
+    </dgm:sp3d>
     <dgm:txPr/>
     <dgm:style>
       <a:lnRef idx="0">
@@ -12353,7 +12723,7 @@
       <a:fillRef idx="3">
         <a:scrgbClr r="0" g="0" b="0"/>
       </a:fillRef>
-      <a:effectRef idx="2">
+      <a:effectRef idx="1">
         <a:scrgbClr r="0" g="0" b="0"/>
       </a:effectRef>
       <a:fontRef idx="minor">
@@ -12364,9 +12734,12 @@
   <dgm:styleLbl name="node3">
     <dgm:scene3d>
       <a:camera prst="orthographicFront"/>
-      <a:lightRig rig="threePt" dir="t"/>
+      <a:lightRig rig="flat" dir="t"/>
     </dgm:scene3d>
-    <dgm:sp3d/>
+    <dgm:sp3d prstMaterial="plastic">
+      <a:bevelT w="120900" h="88900"/>
+      <a:bevelB w="88900" h="31750" prst="angle"/>
+    </dgm:sp3d>
     <dgm:txPr/>
     <dgm:style>
       <a:lnRef idx="0">
@@ -12375,7 +12748,7 @@
       <a:fillRef idx="3">
         <a:scrgbClr r="0" g="0" b="0"/>
       </a:fillRef>
-      <a:effectRef idx="2">
+      <a:effectRef idx="1">
         <a:scrgbClr r="0" g="0" b="0"/>
       </a:effectRef>
       <a:fontRef idx="minor">
@@ -12386,9 +12759,12 @@
   <dgm:styleLbl name="node4">
     <dgm:scene3d>
       <a:camera prst="orthographicFront"/>
-      <a:lightRig rig="threePt" dir="t"/>
+      <a:lightRig rig="flat" dir="t"/>
     </dgm:scene3d>
-    <dgm:sp3d/>
+    <dgm:sp3d prstMaterial="plastic">
+      <a:bevelT w="120900" h="88900"/>
+      <a:bevelB w="88900" h="31750" prst="angle"/>
+    </dgm:sp3d>
     <dgm:txPr/>
     <dgm:style>
       <a:lnRef idx="0">
@@ -12397,7 +12773,7 @@
       <a:fillRef idx="3">
         <a:scrgbClr r="0" g="0" b="0"/>
       </a:fillRef>
-      <a:effectRef idx="2">
+      <a:effectRef idx="1">
         <a:scrgbClr r="0" g="0" b="0"/>
       </a:effectRef>
       <a:fontRef idx="minor">
@@ -12408,15 +12784,18 @@
   <dgm:styleLbl name="fgImgPlace1">
     <dgm:scene3d>
       <a:camera prst="orthographicFront"/>
-      <a:lightRig rig="threePt" dir="t"/>
+      <a:lightRig rig="flat" dir="t"/>
     </dgm:scene3d>
-    <dgm:sp3d/>
+    <dgm:sp3d z="127000" prstMaterial="plastic">
+      <a:bevelT w="88900" h="88900"/>
+      <a:bevelB w="88900" h="31750" prst="angle"/>
+    </dgm:sp3d>
     <dgm:txPr/>
     <dgm:style>
       <a:lnRef idx="0">
         <a:scrgbClr r="0" g="0" b="0"/>
       </a:lnRef>
-      <a:fillRef idx="1">
+      <a:fillRef idx="3">
         <a:scrgbClr r="0" g="0" b="0"/>
       </a:fillRef>
       <a:effectRef idx="2">
@@ -12428,15 +12807,18 @@
   <dgm:styleLbl name="alignImgPlace1">
     <dgm:scene3d>
       <a:camera prst="orthographicFront"/>
-      <a:lightRig rig="threePt" dir="t"/>
+      <a:lightRig rig="flat" dir="t"/>
     </dgm:scene3d>
-    <dgm:sp3d/>
+    <dgm:sp3d prstMaterial="plastic">
+      <a:bevelT w="88900" h="88900"/>
+      <a:bevelB w="88900" h="31750" prst="angle"/>
+    </dgm:sp3d>
     <dgm:txPr/>
     <dgm:style>
       <a:lnRef idx="0">
         <a:scrgbClr r="0" g="0" b="0"/>
       </a:lnRef>
-      <a:fillRef idx="1">
+      <a:fillRef idx="3">
         <a:scrgbClr r="0" g="0" b="0"/>
       </a:fillRef>
       <a:effectRef idx="2">
@@ -12448,15 +12830,18 @@
   <dgm:styleLbl name="bgImgPlace1">
     <dgm:scene3d>
       <a:camera prst="orthographicFront"/>
-      <a:lightRig rig="threePt" dir="t"/>
+      <a:lightRig rig="flat" dir="t"/>
     </dgm:scene3d>
-    <dgm:sp3d/>
+    <dgm:sp3d z="-190500" prstMaterial="plastic">
+      <a:bevelT w="88900" h="88900"/>
+      <a:bevelB w="88900" h="31750" prst="angle"/>
+    </dgm:sp3d>
     <dgm:txPr/>
     <dgm:style>
       <a:lnRef idx="0">
         <a:scrgbClr r="0" g="0" b="0"/>
       </a:lnRef>
-      <a:fillRef idx="1">
+      <a:fillRef idx="3">
         <a:scrgbClr r="0" g="0" b="0"/>
       </a:fillRef>
       <a:effectRef idx="2">
@@ -12468,9 +12853,12 @@
   <dgm:styleLbl name="sibTrans2D1">
     <dgm:scene3d>
       <a:camera prst="orthographicFront"/>
-      <a:lightRig rig="threePt" dir="t"/>
+      <a:lightRig rig="flat" dir="t"/>
     </dgm:scene3d>
-    <dgm:sp3d/>
+    <dgm:sp3d z="-80000" prstMaterial="plastic">
+      <a:bevelT w="50800" h="50800"/>
+      <a:bevelB w="25400" h="25400" prst="angle"/>
+    </dgm:sp3d>
     <dgm:txPr/>
     <dgm:style>
       <a:lnRef idx="0">
@@ -12490,9 +12878,12 @@
   <dgm:styleLbl name="fgSibTrans2D1">
     <dgm:scene3d>
       <a:camera prst="orthographicFront"/>
-      <a:lightRig rig="threePt" dir="t"/>
+      <a:lightRig rig="flat" dir="t"/>
     </dgm:scene3d>
-    <dgm:sp3d/>
+    <dgm:sp3d z="127000" prstMaterial="plastic">
+      <a:bevelT w="50800" h="50800"/>
+      <a:bevelB w="25400" h="25400" prst="angle"/>
+    </dgm:sp3d>
     <dgm:txPr/>
     <dgm:style>
       <a:lnRef idx="0">
@@ -12512,9 +12903,12 @@
   <dgm:styleLbl name="bgSibTrans2D1">
     <dgm:scene3d>
       <a:camera prst="orthographicFront"/>
-      <a:lightRig rig="threePt" dir="t"/>
+      <a:lightRig rig="flat" dir="t"/>
     </dgm:scene3d>
-    <dgm:sp3d/>
+    <dgm:sp3d z="-190500" prstMaterial="plastic">
+      <a:bevelT w="50800" h="50800"/>
+      <a:bevelB w="25400" h="25400" prst="angle"/>
+    </dgm:sp3d>
     <dgm:txPr/>
     <dgm:style>
       <a:lnRef idx="0">
@@ -12534,9 +12928,9 @@
   <dgm:styleLbl name="sibTrans1D1">
     <dgm:scene3d>
       <a:camera prst="orthographicFront"/>
-      <a:lightRig rig="threePt" dir="t"/>
+      <a:lightRig rig="flat" dir="t"/>
     </dgm:scene3d>
-    <dgm:sp3d/>
+    <dgm:sp3d z="-40000" prstMaterial="matte"/>
     <dgm:txPr/>
     <dgm:style>
       <a:lnRef idx="1">
@@ -12556,7 +12950,7 @@
       <a:camera prst="orthographicFront"/>
       <a:lightRig rig="threePt" dir="t"/>
     </dgm:scene3d>
-    <dgm:sp3d/>
+    <dgm:sp3d z="127000" prstMaterial="matte"/>
     <dgm:txPr/>
     <dgm:style>
       <a:lnRef idx="2">
@@ -12565,7 +12959,7 @@
       <a:fillRef idx="1">
         <a:scrgbClr r="0" g="0" b="0"/>
       </a:fillRef>
-      <a:effectRef idx="1">
+      <a:effectRef idx="0">
         <a:scrgbClr r="0" g="0" b="0"/>
       </a:effectRef>
       <a:fontRef idx="minor"/>
@@ -12574,9 +12968,12 @@
   <dgm:styleLbl name="asst0">
     <dgm:scene3d>
       <a:camera prst="orthographicFront"/>
-      <a:lightRig rig="threePt" dir="t"/>
+      <a:lightRig rig="flat" dir="t"/>
     </dgm:scene3d>
-    <dgm:sp3d/>
+    <dgm:sp3d prstMaterial="plastic">
+      <a:bevelT w="120900" h="88900"/>
+      <a:bevelB w="88900" h="31750" prst="angle"/>
+    </dgm:sp3d>
     <dgm:txPr/>
     <dgm:style>
       <a:lnRef idx="0">
@@ -12585,7 +12982,7 @@
       <a:fillRef idx="3">
         <a:scrgbClr r="0" g="0" b="0"/>
       </a:fillRef>
-      <a:effectRef idx="2">
+      <a:effectRef idx="1">
         <a:scrgbClr r="0" g="0" b="0"/>
       </a:effectRef>
       <a:fontRef idx="minor">
@@ -12596,9 +12993,12 @@
   <dgm:styleLbl name="asst1">
     <dgm:scene3d>
       <a:camera prst="orthographicFront"/>
-      <a:lightRig rig="threePt" dir="t"/>
+      <a:lightRig rig="flat" dir="t"/>
     </dgm:scene3d>
-    <dgm:sp3d/>
+    <dgm:sp3d prstMaterial="plastic">
+      <a:bevelT w="120900" h="88900"/>
+      <a:bevelB w="88900" h="31750" prst="angle"/>
+    </dgm:sp3d>
     <dgm:txPr/>
     <dgm:style>
       <a:lnRef idx="0">
@@ -12607,7 +13007,7 @@
       <a:fillRef idx="3">
         <a:scrgbClr r="0" g="0" b="0"/>
       </a:fillRef>
-      <a:effectRef idx="2">
+      <a:effectRef idx="1">
         <a:scrgbClr r="0" g="0" b="0"/>
       </a:effectRef>
       <a:fontRef idx="minor">
@@ -12618,9 +13018,12 @@
   <dgm:styleLbl name="asst2">
     <dgm:scene3d>
       <a:camera prst="orthographicFront"/>
-      <a:lightRig rig="threePt" dir="t"/>
+      <a:lightRig rig="flat" dir="t"/>
     </dgm:scene3d>
-    <dgm:sp3d/>
+    <dgm:sp3d prstMaterial="plastic">
+      <a:bevelT w="120900" h="88900"/>
+      <a:bevelB w="88900" h="31750" prst="angle"/>
+    </dgm:sp3d>
     <dgm:txPr/>
     <dgm:style>
       <a:lnRef idx="0">
@@ -12629,7 +13032,7 @@
       <a:fillRef idx="3">
         <a:scrgbClr r="0" g="0" b="0"/>
       </a:fillRef>
-      <a:effectRef idx="2">
+      <a:effectRef idx="1">
         <a:scrgbClr r="0" g="0" b="0"/>
       </a:effectRef>
       <a:fontRef idx="minor">
@@ -12640,9 +13043,12 @@
   <dgm:styleLbl name="asst3">
     <dgm:scene3d>
       <a:camera prst="orthographicFront"/>
-      <a:lightRig rig="threePt" dir="t"/>
+      <a:lightRig rig="flat" dir="t"/>
     </dgm:scene3d>
-    <dgm:sp3d/>
+    <dgm:sp3d prstMaterial="plastic">
+      <a:bevelT w="120900" h="88900"/>
+      <a:bevelB w="88900" h="31750" prst="angle"/>
+    </dgm:sp3d>
     <dgm:txPr/>
     <dgm:style>
       <a:lnRef idx="0">
@@ -12651,7 +13057,7 @@
       <a:fillRef idx="3">
         <a:scrgbClr r="0" g="0" b="0"/>
       </a:fillRef>
-      <a:effectRef idx="2">
+      <a:effectRef idx="1">
         <a:scrgbClr r="0" g="0" b="0"/>
       </a:effectRef>
       <a:fontRef idx="minor">
@@ -12659,12 +13065,15 @@
       </a:fontRef>
     </dgm:style>
   </dgm:styleLbl>
-  <dgm:styleLbl name="asst4">
+  <dgm:styleLbl name="parChTrans2D1">
     <dgm:scene3d>
       <a:camera prst="orthographicFront"/>
-      <a:lightRig rig="threePt" dir="t"/>
+      <a:lightRig rig="flat" dir="t"/>
     </dgm:scene3d>
-    <dgm:sp3d/>
+    <dgm:sp3d z="-100000" prstMaterial="plastic">
+      <a:bevelT w="120900" h="88900"/>
+      <a:bevelB w="88900" h="31750" prst="angle"/>
+    </dgm:sp3d>
     <dgm:txPr/>
     <dgm:style>
       <a:lnRef idx="0">
@@ -12673,7 +13082,7 @@
       <a:fillRef idx="3">
         <a:scrgbClr r="0" g="0" b="0"/>
       </a:fillRef>
-      <a:effectRef idx="2">
+      <a:effectRef idx="1">
         <a:scrgbClr r="0" g="0" b="0"/>
       </a:effectRef>
       <a:fontRef idx="minor">
@@ -12681,12 +13090,15 @@
       </a:fontRef>
     </dgm:style>
   </dgm:styleLbl>
-  <dgm:styleLbl name="parChTrans2D1">
+  <dgm:styleLbl name="parChTrans2D2">
     <dgm:scene3d>
       <a:camera prst="orthographicFront"/>
-      <a:lightRig rig="threePt" dir="t"/>
+      <a:lightRig rig="flat" dir="t"/>
     </dgm:scene3d>
-    <dgm:sp3d/>
+    <dgm:sp3d z="-60000" prstMaterial="plastic">
+      <a:bevelT w="120900" h="88900"/>
+      <a:bevelB w="88900" h="31750" prst="angle"/>
+    </dgm:sp3d>
     <dgm:txPr/>
     <dgm:style>
       <a:lnRef idx="0">
@@ -12695,7 +13107,7 @@
       <a:fillRef idx="3">
         <a:scrgbClr r="0" g="0" b="0"/>
       </a:fillRef>
-      <a:effectRef idx="2">
+      <a:effectRef idx="1">
         <a:scrgbClr r="0" g="0" b="0"/>
       </a:effectRef>
       <a:fontRef idx="minor">
@@ -12703,12 +13115,15 @@
       </a:fontRef>
     </dgm:style>
   </dgm:styleLbl>
-  <dgm:styleLbl name="parChTrans2D2">
+  <dgm:styleLbl name="parChTrans2D3">
     <dgm:scene3d>
       <a:camera prst="orthographicFront"/>
-      <a:lightRig rig="threePt" dir="t"/>
+      <a:lightRig rig="flat" dir="t"/>
     </dgm:scene3d>
-    <dgm:sp3d/>
+    <dgm:sp3d z="-60000" prstMaterial="plastic">
+      <a:bevelT w="120900" h="88900"/>
+      <a:bevelB w="88900" h="31750" prst="angle"/>
+    </dgm:sp3d>
     <dgm:txPr/>
     <dgm:style>
       <a:lnRef idx="0">
@@ -12717,7 +13132,7 @@
       <a:fillRef idx="3">
         <a:scrgbClr r="0" g="0" b="0"/>
       </a:fillRef>
-      <a:effectRef idx="2">
+      <a:effectRef idx="1">
         <a:scrgbClr r="0" g="0" b="0"/>
       </a:effectRef>
       <a:fontRef idx="minor">
@@ -12725,21 +13140,24 @@
       </a:fontRef>
     </dgm:style>
   </dgm:styleLbl>
-  <dgm:styleLbl name="parChTrans2D3">
+  <dgm:styleLbl name="parChTrans2D4">
     <dgm:scene3d>
       <a:camera prst="orthographicFront"/>
-      <a:lightRig rig="threePt" dir="t"/>
+      <a:lightRig rig="flat" dir="t"/>
     </dgm:scene3d>
-    <dgm:sp3d/>
+    <dgm:sp3d z="-60000" prstMaterial="plastic">
+      <a:bevelT w="120900" h="88900"/>
+      <a:bevelB w="88900" h="31750" prst="angle"/>
+    </dgm:sp3d>
     <dgm:txPr/>
     <dgm:style>
-      <a:lnRef idx="1">
+      <a:lnRef idx="0">
         <a:scrgbClr r="0" g="0" b="0"/>
       </a:lnRef>
       <a:fillRef idx="3">
         <a:scrgbClr r="0" g="0" b="0"/>
       </a:fillRef>
-      <a:effectRef idx="2">
+      <a:effectRef idx="1">
         <a:scrgbClr r="0" g="0" b="0"/>
       </a:effectRef>
       <a:fontRef idx="minor">
@@ -12747,486 +13165,503 @@
       </a:fontRef>
     </dgm:style>
   </dgm:styleLbl>
-  <dgm:styleLbl name="parChTrans2D4">
+  <dgm:styleLbl name="parChTrans1D1">
     <dgm:scene3d>
       <a:camera prst="orthographicFront"/>
-      <a:lightRig rig="threePt" dir="t"/>
+      <a:lightRig rig="flat" dir="t"/>
     </dgm:scene3d>
-    <dgm:sp3d/>
+    <dgm:sp3d prstMaterial="matte"/>
+    <dgm:txPr/>
+    <dgm:style>
+      <a:lnRef idx="2">
+        <a:scrgbClr r="0" g="0" b="0"/>
+      </a:lnRef>
+      <a:fillRef idx="0">
+        <a:scrgbClr r="0" g="0" b="0"/>
+      </a:fillRef>
+      <a:effectRef idx="0">
+        <a:scrgbClr r="0" g="0" b="0"/>
+      </a:effectRef>
+      <a:fontRef idx="minor"/>
+    </dgm:style>
+  </dgm:styleLbl>
+  <dgm:styleLbl name="parChTrans1D2">
+    <dgm:scene3d>
+      <a:camera prst="orthographicFront"/>
+      <a:lightRig rig="flat" dir="t"/>
+    </dgm:scene3d>
+    <dgm:sp3d prstMaterial="matte"/>
+    <dgm:txPr/>
+    <dgm:style>
+      <a:lnRef idx="2">
+        <a:scrgbClr r="0" g="0" b="0"/>
+      </a:lnRef>
+      <a:fillRef idx="0">
+        <a:scrgbClr r="0" g="0" b="0"/>
+      </a:fillRef>
+      <a:effectRef idx="0">
+        <a:scrgbClr r="0" g="0" b="0"/>
+      </a:effectRef>
+      <a:fontRef idx="minor"/>
+    </dgm:style>
+  </dgm:styleLbl>
+  <dgm:styleLbl name="parChTrans1D3">
+    <dgm:scene3d>
+      <a:camera prst="orthographicFront"/>
+      <a:lightRig rig="flat" dir="t"/>
+    </dgm:scene3d>
+    <dgm:sp3d prstMaterial="matte"/>
+    <dgm:txPr/>
+    <dgm:style>
+      <a:lnRef idx="2">
+        <a:scrgbClr r="0" g="0" b="0"/>
+      </a:lnRef>
+      <a:fillRef idx="0">
+        <a:scrgbClr r="0" g="0" b="0"/>
+      </a:fillRef>
+      <a:effectRef idx="0">
+        <a:scrgbClr r="0" g="0" b="0"/>
+      </a:effectRef>
+      <a:fontRef idx="minor"/>
+    </dgm:style>
+  </dgm:styleLbl>
+  <dgm:styleLbl name="parChTrans1D4">
+    <dgm:scene3d>
+      <a:camera prst="orthographicFront"/>
+      <a:lightRig rig="flat" dir="t"/>
+    </dgm:scene3d>
+    <dgm:sp3d prstMaterial="matte"/>
+    <dgm:txPr/>
+    <dgm:style>
+      <a:lnRef idx="2">
+        <a:scrgbClr r="0" g="0" b="0"/>
+      </a:lnRef>
+      <a:fillRef idx="0">
+        <a:scrgbClr r="0" g="0" b="0"/>
+      </a:fillRef>
+      <a:effectRef idx="0">
+        <a:scrgbClr r="0" g="0" b="0"/>
+      </a:effectRef>
+      <a:fontRef idx="minor"/>
+    </dgm:style>
+  </dgm:styleLbl>
+  <dgm:styleLbl name="fgAcc1">
+    <dgm:scene3d>
+      <a:camera prst="orthographicFront"/>
+      <a:lightRig rig="flat" dir="t"/>
+    </dgm:scene3d>
+    <dgm:sp3d z="190500" extrusionH="12700" prstMaterial="plastic">
+      <a:bevelT w="50800" h="50800"/>
+    </dgm:sp3d>
     <dgm:txPr/>
     <dgm:style>
       <a:lnRef idx="1">
         <a:scrgbClr r="0" g="0" b="0"/>
       </a:lnRef>
-      <a:fillRef idx="3">
+      <a:fillRef idx="1">
         <a:scrgbClr r="0" g="0" b="0"/>
       </a:fillRef>
       <a:effectRef idx="2">
+        <a:scrgbClr r="0" g="0" b="0"/>
+      </a:effectRef>
+      <a:fontRef idx="minor"/>
+    </dgm:style>
+  </dgm:styleLbl>
+  <dgm:styleLbl name="conFgAcc1">
+    <dgm:scene3d>
+      <a:camera prst="orthographicFront"/>
+      <a:lightRig rig="flat" dir="t"/>
+    </dgm:scene3d>
+    <dgm:sp3d z="190500" extrusionH="12700" prstMaterial="plastic">
+      <a:bevelT w="50800" h="50800"/>
+    </dgm:sp3d>
+    <dgm:txPr/>
+    <dgm:style>
+      <a:lnRef idx="1">
+        <a:scrgbClr r="0" g="0" b="0"/>
+      </a:lnRef>
+      <a:fillRef idx="1">
+        <a:scrgbClr r="0" g="0" b="0"/>
+      </a:fillRef>
+      <a:effectRef idx="2">
+        <a:scrgbClr r="0" g="0" b="0"/>
+      </a:effectRef>
+      <a:fontRef idx="minor"/>
+    </dgm:style>
+  </dgm:styleLbl>
+  <dgm:styleLbl name="alignAcc1">
+    <dgm:scene3d>
+      <a:camera prst="orthographicFront"/>
+      <a:lightRig rig="flat" dir="t"/>
+    </dgm:scene3d>
+    <dgm:sp3d extrusionH="12700" prstMaterial="plastic">
+      <a:bevelT w="50800" h="50800"/>
+    </dgm:sp3d>
+    <dgm:txPr/>
+    <dgm:style>
+      <a:lnRef idx="1">
+        <a:scrgbClr r="0" g="0" b="0"/>
+      </a:lnRef>
+      <a:fillRef idx="1">
+        <a:scrgbClr r="0" g="0" b="0"/>
+      </a:fillRef>
+      <a:effectRef idx="2">
+        <a:scrgbClr r="0" g="0" b="0"/>
+      </a:effectRef>
+      <a:fontRef idx="minor"/>
+    </dgm:style>
+  </dgm:styleLbl>
+  <dgm:styleLbl name="trAlignAcc1">
+    <dgm:scene3d>
+      <a:camera prst="orthographicFront"/>
+      <a:lightRig rig="flat" dir="t"/>
+    </dgm:scene3d>
+    <dgm:sp3d extrusionH="12700" prstMaterial="plastic">
+      <a:bevelT w="50800" h="50800"/>
+    </dgm:sp3d>
+    <dgm:txPr/>
+    <dgm:style>
+      <a:lnRef idx="1">
+        <a:scrgbClr r="0" g="0" b="0"/>
+      </a:lnRef>
+      <a:fillRef idx="1">
+        <a:scrgbClr r="0" g="0" b="0"/>
+      </a:fillRef>
+      <a:effectRef idx="2">
+        <a:scrgbClr r="0" g="0" b="0"/>
+      </a:effectRef>
+      <a:fontRef idx="minor"/>
+    </dgm:style>
+  </dgm:styleLbl>
+  <dgm:styleLbl name="bgAcc1">
+    <dgm:scene3d>
+      <a:camera prst="orthographicFront"/>
+      <a:lightRig rig="flat" dir="t"/>
+    </dgm:scene3d>
+    <dgm:sp3d z="-190500" extrusionH="12700" prstMaterial="plastic">
+      <a:bevelT w="50800" h="50800"/>
+    </dgm:sp3d>
+    <dgm:txPr/>
+    <dgm:style>
+      <a:lnRef idx="1">
+        <a:scrgbClr r="0" g="0" b="0"/>
+      </a:lnRef>
+      <a:fillRef idx="1">
+        <a:scrgbClr r="0" g="0" b="0"/>
+      </a:fillRef>
+      <a:effectRef idx="2">
+        <a:scrgbClr r="0" g="0" b="0"/>
+      </a:effectRef>
+      <a:fontRef idx="minor"/>
+    </dgm:style>
+  </dgm:styleLbl>
+  <dgm:styleLbl name="solidFgAcc1">
+    <dgm:scene3d>
+      <a:camera prst="orthographicFront"/>
+      <a:lightRig rig="flat" dir="t"/>
+    </dgm:scene3d>
+    <dgm:sp3d z="190500" extrusionH="12700" prstMaterial="plastic">
+      <a:bevelT w="50800" h="50800"/>
+    </dgm:sp3d>
+    <dgm:txPr/>
+    <dgm:style>
+      <a:lnRef idx="1">
+        <a:scrgbClr r="0" g="0" b="0"/>
+      </a:lnRef>
+      <a:fillRef idx="1">
+        <a:scrgbClr r="0" g="0" b="0"/>
+      </a:fillRef>
+      <a:effectRef idx="2">
+        <a:scrgbClr r="0" g="0" b="0"/>
+      </a:effectRef>
+      <a:fontRef idx="minor"/>
+    </dgm:style>
+  </dgm:styleLbl>
+  <dgm:styleLbl name="solidAlignAcc1">
+    <dgm:scene3d>
+      <a:camera prst="orthographicFront"/>
+      <a:lightRig rig="flat" dir="t"/>
+    </dgm:scene3d>
+    <dgm:sp3d extrusionH="12700" prstMaterial="plastic">
+      <a:bevelT w="50800" h="50800"/>
+    </dgm:sp3d>
+    <dgm:txPr/>
+    <dgm:style>
+      <a:lnRef idx="1">
+        <a:scrgbClr r="0" g="0" b="0"/>
+      </a:lnRef>
+      <a:fillRef idx="1">
+        <a:scrgbClr r="0" g="0" b="0"/>
+      </a:fillRef>
+      <a:effectRef idx="2">
+        <a:scrgbClr r="0" g="0" b="0"/>
+      </a:effectRef>
+      <a:fontRef idx="minor"/>
+    </dgm:style>
+  </dgm:styleLbl>
+  <dgm:styleLbl name="solidBgAcc1">
+    <dgm:scene3d>
+      <a:camera prst="orthographicFront"/>
+      <a:lightRig rig="flat" dir="t"/>
+    </dgm:scene3d>
+    <dgm:sp3d z="-190500" extrusionH="12700" prstMaterial="plastic">
+      <a:bevelT w="50800" h="50800"/>
+    </dgm:sp3d>
+    <dgm:txPr/>
+    <dgm:style>
+      <a:lnRef idx="1">
+        <a:scrgbClr r="0" g="0" b="0"/>
+      </a:lnRef>
+      <a:fillRef idx="1">
+        <a:scrgbClr r="0" g="0" b="0"/>
+      </a:fillRef>
+      <a:effectRef idx="2">
+        <a:scrgbClr r="0" g="0" b="0"/>
+      </a:effectRef>
+      <a:fontRef idx="minor"/>
+    </dgm:style>
+  </dgm:styleLbl>
+  <dgm:styleLbl name="fgAccFollowNode1">
+    <dgm:scene3d>
+      <a:camera prst="orthographicFront"/>
+      <a:lightRig rig="flat" dir="t"/>
+    </dgm:scene3d>
+    <dgm:sp3d z="190500" extrusionH="12700" prstMaterial="plastic">
+      <a:bevelT w="50800" h="50800"/>
+    </dgm:sp3d>
+    <dgm:txPr/>
+    <dgm:style>
+      <a:lnRef idx="1">
+        <a:scrgbClr r="0" g="0" b="0"/>
+      </a:lnRef>
+      <a:fillRef idx="1">
+        <a:scrgbClr r="0" g="0" b="0"/>
+      </a:fillRef>
+      <a:effectRef idx="2">
+        <a:scrgbClr r="0" g="0" b="0"/>
+      </a:effectRef>
+      <a:fontRef idx="minor"/>
+    </dgm:style>
+  </dgm:styleLbl>
+  <dgm:styleLbl name="alignAccFollowNode1">
+    <dgm:scene3d>
+      <a:camera prst="orthographicFront"/>
+      <a:lightRig rig="flat" dir="t"/>
+    </dgm:scene3d>
+    <dgm:sp3d extrusionH="12700" prstMaterial="plastic">
+      <a:bevelT w="50800" h="50800"/>
+    </dgm:sp3d>
+    <dgm:txPr/>
+    <dgm:style>
+      <a:lnRef idx="1">
+        <a:scrgbClr r="0" g="0" b="0"/>
+      </a:lnRef>
+      <a:fillRef idx="1">
+        <a:scrgbClr r="0" g="0" b="0"/>
+      </a:fillRef>
+      <a:effectRef idx="2">
+        <a:scrgbClr r="0" g="0" b="0"/>
+      </a:effectRef>
+      <a:fontRef idx="minor"/>
+    </dgm:style>
+  </dgm:styleLbl>
+  <dgm:styleLbl name="bgAccFollowNode1">
+    <dgm:scene3d>
+      <a:camera prst="orthographicFront"/>
+      <a:lightRig rig="flat" dir="t"/>
+    </dgm:scene3d>
+    <dgm:sp3d z="-190500" extrusionH="12700" prstMaterial="plastic">
+      <a:bevelT w="50800" h="50800"/>
+    </dgm:sp3d>
+    <dgm:txPr/>
+    <dgm:style>
+      <a:lnRef idx="1">
+        <a:scrgbClr r="0" g="0" b="0"/>
+      </a:lnRef>
+      <a:fillRef idx="1">
+        <a:scrgbClr r="0" g="0" b="0"/>
+      </a:fillRef>
+      <a:effectRef idx="2">
+        <a:scrgbClr r="0" g="0" b="0"/>
+      </a:effectRef>
+      <a:fontRef idx="minor"/>
+    </dgm:style>
+  </dgm:styleLbl>
+  <dgm:styleLbl name="fgAcc0">
+    <dgm:scene3d>
+      <a:camera prst="orthographicFront"/>
+      <a:lightRig rig="flat" dir="t"/>
+    </dgm:scene3d>
+    <dgm:sp3d z="190500" extrusionH="12700" prstMaterial="plastic">
+      <a:bevelT w="50800" h="50800"/>
+    </dgm:sp3d>
+    <dgm:txPr/>
+    <dgm:style>
+      <a:lnRef idx="1">
+        <a:scrgbClr r="0" g="0" b="0"/>
+      </a:lnRef>
+      <a:fillRef idx="1">
+        <a:scrgbClr r="0" g="0" b="0"/>
+      </a:fillRef>
+      <a:effectRef idx="2">
+        <a:scrgbClr r="0" g="0" b="0"/>
+      </a:effectRef>
+      <a:fontRef idx="minor"/>
+    </dgm:style>
+  </dgm:styleLbl>
+  <dgm:styleLbl name="fgAcc2">
+    <dgm:scene3d>
+      <a:camera prst="orthographicFront"/>
+      <a:lightRig rig="flat" dir="t"/>
+    </dgm:scene3d>
+    <dgm:sp3d z="190500" extrusionH="12700" prstMaterial="plastic">
+      <a:bevelT w="50800" h="50800"/>
+    </dgm:sp3d>
+    <dgm:txPr/>
+    <dgm:style>
+      <a:lnRef idx="1">
+        <a:scrgbClr r="0" g="0" b="0"/>
+      </a:lnRef>
+      <a:fillRef idx="1">
+        <a:scrgbClr r="0" g="0" b="0"/>
+      </a:fillRef>
+      <a:effectRef idx="2">
+        <a:scrgbClr r="0" g="0" b="0"/>
+      </a:effectRef>
+      <a:fontRef idx="minor"/>
+    </dgm:style>
+  </dgm:styleLbl>
+  <dgm:styleLbl name="fgAcc3">
+    <dgm:scene3d>
+      <a:camera prst="orthographicFront"/>
+      <a:lightRig rig="flat" dir="t"/>
+    </dgm:scene3d>
+    <dgm:sp3d z="190500" extrusionH="12700" prstMaterial="plastic">
+      <a:bevelT w="50800" h="50800"/>
+    </dgm:sp3d>
+    <dgm:txPr/>
+    <dgm:style>
+      <a:lnRef idx="1">
+        <a:scrgbClr r="0" g="0" b="0"/>
+      </a:lnRef>
+      <a:fillRef idx="1">
+        <a:scrgbClr r="0" g="0" b="0"/>
+      </a:fillRef>
+      <a:effectRef idx="2">
+        <a:scrgbClr r="0" g="0" b="0"/>
+      </a:effectRef>
+      <a:fontRef idx="minor"/>
+    </dgm:style>
+  </dgm:styleLbl>
+  <dgm:styleLbl name="fgAcc4">
+    <dgm:scene3d>
+      <a:camera prst="orthographicFront"/>
+      <a:lightRig rig="flat" dir="t"/>
+    </dgm:scene3d>
+    <dgm:sp3d z="190500" extrusionH="12700" prstMaterial="plastic">
+      <a:bevelT w="50800" h="50800"/>
+    </dgm:sp3d>
+    <dgm:txPr/>
+    <dgm:style>
+      <a:lnRef idx="1">
+        <a:scrgbClr r="0" g="0" b="0"/>
+      </a:lnRef>
+      <a:fillRef idx="1">
+        <a:scrgbClr r="0" g="0" b="0"/>
+      </a:fillRef>
+      <a:effectRef idx="2">
+        <a:scrgbClr r="0" g="0" b="0"/>
+      </a:effectRef>
+      <a:fontRef idx="minor"/>
+    </dgm:style>
+  </dgm:styleLbl>
+  <dgm:styleLbl name="bgShp">
+    <dgm:scene3d>
+      <a:camera prst="orthographicFront"/>
+      <a:lightRig rig="flat" dir="t"/>
+    </dgm:scene3d>
+    <dgm:sp3d z="-190500" extrusionH="12700" prstMaterial="plastic">
+      <a:bevelT w="50800" h="50800"/>
+    </dgm:sp3d>
+    <dgm:txPr/>
+    <dgm:style>
+      <a:lnRef idx="0">
+        <a:scrgbClr r="0" g="0" b="0"/>
+      </a:lnRef>
+      <a:fillRef idx="3">
+        <a:scrgbClr r="0" g="0" b="0"/>
+      </a:fillRef>
+      <a:effectRef idx="0">
+        <a:scrgbClr r="0" g="0" b="0"/>
+      </a:effectRef>
+      <a:fontRef idx="minor"/>
+    </dgm:style>
+  </dgm:styleLbl>
+  <dgm:styleLbl name="dkBgShp">
+    <dgm:scene3d>
+      <a:camera prst="orthographicFront"/>
+      <a:lightRig rig="flat" dir="t"/>
+    </dgm:scene3d>
+    <dgm:sp3d z="-190500" extrusionH="12700" prstMaterial="plastic">
+      <a:bevelT w="50800" h="50800"/>
+    </dgm:sp3d>
+    <dgm:txPr/>
+    <dgm:style>
+      <a:lnRef idx="0">
+        <a:scrgbClr r="0" g="0" b="0"/>
+      </a:lnRef>
+      <a:fillRef idx="2">
+        <a:scrgbClr r="0" g="0" b="0"/>
+      </a:fillRef>
+      <a:effectRef idx="0">
+        <a:scrgbClr r="0" g="0" b="0"/>
+      </a:effectRef>
+      <a:fontRef idx="minor"/>
+    </dgm:style>
+  </dgm:styleLbl>
+  <dgm:styleLbl name="trBgShp">
+    <dgm:scene3d>
+      <a:camera prst="orthographicFront"/>
+      <a:lightRig rig="flat" dir="t"/>
+    </dgm:scene3d>
+    <dgm:sp3d z="-190500" extrusionH="12700" prstMaterial="matte"/>
+    <dgm:txPr/>
+    <dgm:style>
+      <a:lnRef idx="0">
+        <a:scrgbClr r="0" g="0" b="0"/>
+      </a:lnRef>
+      <a:fillRef idx="1">
+        <a:scrgbClr r="0" g="0" b="0"/>
+      </a:fillRef>
+      <a:effectRef idx="0">
+        <a:scrgbClr r="0" g="0" b="0"/>
+      </a:effectRef>
+      <a:fontRef idx="minor"/>
+    </dgm:style>
+  </dgm:styleLbl>
+  <dgm:styleLbl name="fgShp">
+    <dgm:scene3d>
+      <a:camera prst="orthographicFront"/>
+      <a:lightRig rig="flat" dir="t"/>
+    </dgm:scene3d>
+    <dgm:sp3d z="190500" prstMaterial="plastic">
+      <a:bevelT w="120900" h="88900"/>
+      <a:bevelB w="88900" h="31750" prst="angle"/>
+    </dgm:sp3d>
+    <dgm:txPr/>
+    <dgm:style>
+      <a:lnRef idx="0">
+        <a:scrgbClr r="0" g="0" b="0"/>
+      </a:lnRef>
+      <a:fillRef idx="1">
+        <a:scrgbClr r="0" g="0" b="0"/>
+      </a:fillRef>
+      <a:effectRef idx="3">
         <a:scrgbClr r="0" g="0" b="0"/>
       </a:effectRef>
       <a:fontRef idx="minor">
         <a:schemeClr val="lt1"/>
       </a:fontRef>
-    </dgm:style>
-  </dgm:styleLbl>
-  <dgm:styleLbl name="parChTrans1D1">
-    <dgm:scene3d>
-      <a:camera prst="orthographicFront"/>
-      <a:lightRig rig="threePt" dir="t"/>
-    </dgm:scene3d>
-    <dgm:sp3d/>
-    <dgm:txPr/>
-    <dgm:style>
-      <a:lnRef idx="1">
-        <a:scrgbClr r="0" g="0" b="0"/>
-      </a:lnRef>
-      <a:fillRef idx="0">
-        <a:scrgbClr r="0" g="0" b="0"/>
-      </a:fillRef>
-      <a:effectRef idx="0">
-        <a:scrgbClr r="0" g="0" b="0"/>
-      </a:effectRef>
-      <a:fontRef idx="minor"/>
-    </dgm:style>
-  </dgm:styleLbl>
-  <dgm:styleLbl name="parChTrans1D2">
-    <dgm:scene3d>
-      <a:camera prst="orthographicFront"/>
-      <a:lightRig rig="threePt" dir="t"/>
-    </dgm:scene3d>
-    <dgm:sp3d/>
-    <dgm:txPr/>
-    <dgm:style>
-      <a:lnRef idx="1">
-        <a:scrgbClr r="0" g="0" b="0"/>
-      </a:lnRef>
-      <a:fillRef idx="0">
-        <a:scrgbClr r="0" g="0" b="0"/>
-      </a:fillRef>
-      <a:effectRef idx="0">
-        <a:scrgbClr r="0" g="0" b="0"/>
-      </a:effectRef>
-      <a:fontRef idx="minor"/>
-    </dgm:style>
-  </dgm:styleLbl>
-  <dgm:styleLbl name="parChTrans1D3">
-    <dgm:scene3d>
-      <a:camera prst="orthographicFront"/>
-      <a:lightRig rig="threePt" dir="t"/>
-    </dgm:scene3d>
-    <dgm:sp3d/>
-    <dgm:txPr/>
-    <dgm:style>
-      <a:lnRef idx="1">
-        <a:scrgbClr r="0" g="0" b="0"/>
-      </a:lnRef>
-      <a:fillRef idx="0">
-        <a:scrgbClr r="0" g="0" b="0"/>
-      </a:fillRef>
-      <a:effectRef idx="0">
-        <a:scrgbClr r="0" g="0" b="0"/>
-      </a:effectRef>
-      <a:fontRef idx="minor"/>
-    </dgm:style>
-  </dgm:styleLbl>
-  <dgm:styleLbl name="parChTrans1D4">
-    <dgm:scene3d>
-      <a:camera prst="orthographicFront"/>
-      <a:lightRig rig="threePt" dir="t"/>
-    </dgm:scene3d>
-    <dgm:sp3d/>
-    <dgm:txPr/>
-    <dgm:style>
-      <a:lnRef idx="1">
-        <a:scrgbClr r="0" g="0" b="0"/>
-      </a:lnRef>
-      <a:fillRef idx="0">
-        <a:scrgbClr r="0" g="0" b="0"/>
-      </a:fillRef>
-      <a:effectRef idx="0">
-        <a:scrgbClr r="0" g="0" b="0"/>
-      </a:effectRef>
-      <a:fontRef idx="minor"/>
-    </dgm:style>
-  </dgm:styleLbl>
-  <dgm:styleLbl name="fgAcc1">
-    <dgm:scene3d>
-      <a:camera prst="orthographicFront"/>
-      <a:lightRig rig="threePt" dir="t"/>
-    </dgm:scene3d>
-    <dgm:sp3d/>
-    <dgm:txPr/>
-    <dgm:style>
-      <a:lnRef idx="1">
-        <a:scrgbClr r="0" g="0" b="0"/>
-      </a:lnRef>
-      <a:fillRef idx="1">
-        <a:scrgbClr r="0" g="0" b="0"/>
-      </a:fillRef>
-      <a:effectRef idx="0">
-        <a:scrgbClr r="0" g="0" b="0"/>
-      </a:effectRef>
-      <a:fontRef idx="minor"/>
-    </dgm:style>
-  </dgm:styleLbl>
-  <dgm:styleLbl name="conFgAcc1">
-    <dgm:scene3d>
-      <a:camera prst="orthographicFront"/>
-      <a:lightRig rig="threePt" dir="t"/>
-    </dgm:scene3d>
-    <dgm:sp3d/>
-    <dgm:txPr/>
-    <dgm:style>
-      <a:lnRef idx="1">
-        <a:scrgbClr r="0" g="0" b="0"/>
-      </a:lnRef>
-      <a:fillRef idx="1">
-        <a:scrgbClr r="0" g="0" b="0"/>
-      </a:fillRef>
-      <a:effectRef idx="0">
-        <a:scrgbClr r="0" g="0" b="0"/>
-      </a:effectRef>
-      <a:fontRef idx="minor"/>
-    </dgm:style>
-  </dgm:styleLbl>
-  <dgm:styleLbl name="alignAcc1">
-    <dgm:scene3d>
-      <a:camera prst="orthographicFront"/>
-      <a:lightRig rig="threePt" dir="t"/>
-    </dgm:scene3d>
-    <dgm:sp3d/>
-    <dgm:txPr/>
-    <dgm:style>
-      <a:lnRef idx="1">
-        <a:scrgbClr r="0" g="0" b="0"/>
-      </a:lnRef>
-      <a:fillRef idx="1">
-        <a:scrgbClr r="0" g="0" b="0"/>
-      </a:fillRef>
-      <a:effectRef idx="0">
-        <a:scrgbClr r="0" g="0" b="0"/>
-      </a:effectRef>
-      <a:fontRef idx="minor"/>
-    </dgm:style>
-  </dgm:styleLbl>
-  <dgm:styleLbl name="trAlignAcc1">
-    <dgm:scene3d>
-      <a:camera prst="orthographicFront"/>
-      <a:lightRig rig="threePt" dir="t"/>
-    </dgm:scene3d>
-    <dgm:sp3d/>
-    <dgm:txPr/>
-    <dgm:style>
-      <a:lnRef idx="1">
-        <a:scrgbClr r="0" g="0" b="0"/>
-      </a:lnRef>
-      <a:fillRef idx="1">
-        <a:scrgbClr r="0" g="0" b="0"/>
-      </a:fillRef>
-      <a:effectRef idx="0">
-        <a:scrgbClr r="0" g="0" b="0"/>
-      </a:effectRef>
-      <a:fontRef idx="minor"/>
-    </dgm:style>
-  </dgm:styleLbl>
-  <dgm:styleLbl name="bgAcc1">
-    <dgm:scene3d>
-      <a:camera prst="orthographicFront"/>
-      <a:lightRig rig="threePt" dir="t"/>
-    </dgm:scene3d>
-    <dgm:sp3d/>
-    <dgm:txPr/>
-    <dgm:style>
-      <a:lnRef idx="1">
-        <a:scrgbClr r="0" g="0" b="0"/>
-      </a:lnRef>
-      <a:fillRef idx="1">
-        <a:scrgbClr r="0" g="0" b="0"/>
-      </a:fillRef>
-      <a:effectRef idx="0">
-        <a:scrgbClr r="0" g="0" b="0"/>
-      </a:effectRef>
-      <a:fontRef idx="minor"/>
-    </dgm:style>
-  </dgm:styleLbl>
-  <dgm:styleLbl name="solidFgAcc1">
-    <dgm:scene3d>
-      <a:camera prst="orthographicFront"/>
-      <a:lightRig rig="threePt" dir="t"/>
-    </dgm:scene3d>
-    <dgm:sp3d/>
-    <dgm:txPr/>
-    <dgm:style>
-      <a:lnRef idx="1">
-        <a:scrgbClr r="0" g="0" b="0"/>
-      </a:lnRef>
-      <a:fillRef idx="1">
-        <a:scrgbClr r="0" g="0" b="0"/>
-      </a:fillRef>
-      <a:effectRef idx="0">
-        <a:scrgbClr r="0" g="0" b="0"/>
-      </a:effectRef>
-      <a:fontRef idx="minor"/>
-    </dgm:style>
-  </dgm:styleLbl>
-  <dgm:styleLbl name="solidAlignAcc1">
-    <dgm:scene3d>
-      <a:camera prst="orthographicFront"/>
-      <a:lightRig rig="threePt" dir="t"/>
-    </dgm:scene3d>
-    <dgm:sp3d/>
-    <dgm:txPr/>
-    <dgm:style>
-      <a:lnRef idx="1">
-        <a:scrgbClr r="0" g="0" b="0"/>
-      </a:lnRef>
-      <a:fillRef idx="1">
-        <a:scrgbClr r="0" g="0" b="0"/>
-      </a:fillRef>
-      <a:effectRef idx="0">
-        <a:scrgbClr r="0" g="0" b="0"/>
-      </a:effectRef>
-      <a:fontRef idx="minor"/>
-    </dgm:style>
-  </dgm:styleLbl>
-  <dgm:styleLbl name="solidBgAcc1">
-    <dgm:scene3d>
-      <a:camera prst="orthographicFront"/>
-      <a:lightRig rig="threePt" dir="t"/>
-    </dgm:scene3d>
-    <dgm:sp3d/>
-    <dgm:txPr/>
-    <dgm:style>
-      <a:lnRef idx="1">
-        <a:scrgbClr r="0" g="0" b="0"/>
-      </a:lnRef>
-      <a:fillRef idx="1">
-        <a:scrgbClr r="0" g="0" b="0"/>
-      </a:fillRef>
-      <a:effectRef idx="0">
-        <a:scrgbClr r="0" g="0" b="0"/>
-      </a:effectRef>
-      <a:fontRef idx="minor"/>
-    </dgm:style>
-  </dgm:styleLbl>
-  <dgm:styleLbl name="fgAccFollowNode1">
-    <dgm:scene3d>
-      <a:camera prst="orthographicFront"/>
-      <a:lightRig rig="threePt" dir="t"/>
-    </dgm:scene3d>
-    <dgm:sp3d/>
-    <dgm:txPr/>
-    <dgm:style>
-      <a:lnRef idx="1">
-        <a:scrgbClr r="0" g="0" b="0"/>
-      </a:lnRef>
-      <a:fillRef idx="1">
-        <a:scrgbClr r="0" g="0" b="0"/>
-      </a:fillRef>
-      <a:effectRef idx="0">
-        <a:scrgbClr r="0" g="0" b="0"/>
-      </a:effectRef>
-      <a:fontRef idx="minor"/>
-    </dgm:style>
-  </dgm:styleLbl>
-  <dgm:styleLbl name="alignAccFollowNode1">
-    <dgm:scene3d>
-      <a:camera prst="orthographicFront"/>
-      <a:lightRig rig="threePt" dir="t"/>
-    </dgm:scene3d>
-    <dgm:sp3d/>
-    <dgm:txPr/>
-    <dgm:style>
-      <a:lnRef idx="1">
-        <a:scrgbClr r="0" g="0" b="0"/>
-      </a:lnRef>
-      <a:fillRef idx="1">
-        <a:scrgbClr r="0" g="0" b="0"/>
-      </a:fillRef>
-      <a:effectRef idx="0">
-        <a:scrgbClr r="0" g="0" b="0"/>
-      </a:effectRef>
-      <a:fontRef idx="minor"/>
-    </dgm:style>
-  </dgm:styleLbl>
-  <dgm:styleLbl name="bgAccFollowNode1">
-    <dgm:scene3d>
-      <a:camera prst="orthographicFront"/>
-      <a:lightRig rig="threePt" dir="t"/>
-    </dgm:scene3d>
-    <dgm:sp3d/>
-    <dgm:txPr/>
-    <dgm:style>
-      <a:lnRef idx="1">
-        <a:scrgbClr r="0" g="0" b="0"/>
-      </a:lnRef>
-      <a:fillRef idx="1">
-        <a:scrgbClr r="0" g="0" b="0"/>
-      </a:fillRef>
-      <a:effectRef idx="0">
-        <a:scrgbClr r="0" g="0" b="0"/>
-      </a:effectRef>
-      <a:fontRef idx="minor"/>
-    </dgm:style>
-  </dgm:styleLbl>
-  <dgm:styleLbl name="fgAcc0">
-    <dgm:scene3d>
-      <a:camera prst="orthographicFront"/>
-      <a:lightRig rig="threePt" dir="t"/>
-    </dgm:scene3d>
-    <dgm:sp3d/>
-    <dgm:txPr/>
-    <dgm:style>
-      <a:lnRef idx="1">
-        <a:scrgbClr r="0" g="0" b="0"/>
-      </a:lnRef>
-      <a:fillRef idx="1">
-        <a:scrgbClr r="0" g="0" b="0"/>
-      </a:fillRef>
-      <a:effectRef idx="0">
-        <a:scrgbClr r="0" g="0" b="0"/>
-      </a:effectRef>
-      <a:fontRef idx="minor"/>
-    </dgm:style>
-  </dgm:styleLbl>
-  <dgm:styleLbl name="fgAcc2">
-    <dgm:scene3d>
-      <a:camera prst="orthographicFront"/>
-      <a:lightRig rig="threePt" dir="t"/>
-    </dgm:scene3d>
-    <dgm:sp3d/>
-    <dgm:txPr/>
-    <dgm:style>
-      <a:lnRef idx="1">
-        <a:scrgbClr r="0" g="0" b="0"/>
-      </a:lnRef>
-      <a:fillRef idx="1">
-        <a:scrgbClr r="0" g="0" b="0"/>
-      </a:fillRef>
-      <a:effectRef idx="0">
-        <a:scrgbClr r="0" g="0" b="0"/>
-      </a:effectRef>
-      <a:fontRef idx="minor"/>
-    </dgm:style>
-  </dgm:styleLbl>
-  <dgm:styleLbl name="fgAcc3">
-    <dgm:scene3d>
-      <a:camera prst="orthographicFront"/>
-      <a:lightRig rig="threePt" dir="t"/>
-    </dgm:scene3d>
-    <dgm:sp3d/>
-    <dgm:txPr/>
-    <dgm:style>
-      <a:lnRef idx="1">
-        <a:scrgbClr r="0" g="0" b="0"/>
-      </a:lnRef>
-      <a:fillRef idx="1">
-        <a:scrgbClr r="0" g="0" b="0"/>
-      </a:fillRef>
-      <a:effectRef idx="0">
-        <a:scrgbClr r="0" g="0" b="0"/>
-      </a:effectRef>
-      <a:fontRef idx="minor"/>
-    </dgm:style>
-  </dgm:styleLbl>
-  <dgm:styleLbl name="fgAcc4">
-    <dgm:scene3d>
-      <a:camera prst="orthographicFront"/>
-      <a:lightRig rig="threePt" dir="t"/>
-    </dgm:scene3d>
-    <dgm:sp3d/>
-    <dgm:txPr/>
-    <dgm:style>
-      <a:lnRef idx="1">
-        <a:scrgbClr r="0" g="0" b="0"/>
-      </a:lnRef>
-      <a:fillRef idx="1">
-        <a:scrgbClr r="0" g="0" b="0"/>
-      </a:fillRef>
-      <a:effectRef idx="0">
-        <a:scrgbClr r="0" g="0" b="0"/>
-      </a:effectRef>
-      <a:fontRef idx="minor"/>
-    </dgm:style>
-  </dgm:styleLbl>
-  <dgm:styleLbl name="bgShp">
-    <dgm:scene3d>
-      <a:camera prst="orthographicFront"/>
-      <a:lightRig rig="threePt" dir="t"/>
-    </dgm:scene3d>
-    <dgm:sp3d/>
-    <dgm:txPr/>
-    <dgm:style>
-      <a:lnRef idx="0">
-        <a:scrgbClr r="0" g="0" b="0"/>
-      </a:lnRef>
-      <a:fillRef idx="1">
-        <a:scrgbClr r="0" g="0" b="0"/>
-      </a:fillRef>
-      <a:effectRef idx="2">
-        <a:scrgbClr r="0" g="0" b="0"/>
-      </a:effectRef>
-      <a:fontRef idx="minor"/>
-    </dgm:style>
-  </dgm:styleLbl>
-  <dgm:styleLbl name="dkBgShp">
-    <dgm:scene3d>
-      <a:camera prst="orthographicFront"/>
-      <a:lightRig rig="threePt" dir="t"/>
-    </dgm:scene3d>
-    <dgm:sp3d/>
-    <dgm:txPr/>
-    <dgm:style>
-      <a:lnRef idx="0">
-        <a:scrgbClr r="0" g="0" b="0"/>
-      </a:lnRef>
-      <a:fillRef idx="1">
-        <a:scrgbClr r="0" g="0" b="0"/>
-      </a:fillRef>
-      <a:effectRef idx="2">
-        <a:scrgbClr r="0" g="0" b="0"/>
-      </a:effectRef>
-      <a:fontRef idx="minor"/>
-    </dgm:style>
-  </dgm:styleLbl>
-  <dgm:styleLbl name="trBgShp">
-    <dgm:scene3d>
-      <a:camera prst="orthographicFront"/>
-      <a:lightRig rig="threePt" dir="t"/>
-    </dgm:scene3d>
-    <dgm:sp3d/>
-    <dgm:txPr/>
-    <dgm:style>
-      <a:lnRef idx="0">
-        <a:scrgbClr r="0" g="0" b="0"/>
-      </a:lnRef>
-      <a:fillRef idx="1">
-        <a:scrgbClr r="0" g="0" b="0"/>
-      </a:fillRef>
-      <a:effectRef idx="0">
-        <a:scrgbClr r="0" g="0" b="0"/>
-      </a:effectRef>
-      <a:fontRef idx="minor"/>
-    </dgm:style>
-  </dgm:styleLbl>
-  <dgm:styleLbl name="fgShp">
-    <dgm:scene3d>
-      <a:camera prst="orthographicFront"/>
-      <a:lightRig rig="threePt" dir="t"/>
-    </dgm:scene3d>
-    <dgm:sp3d/>
-    <dgm:txPr/>
-    <dgm:style>
-      <a:lnRef idx="0">
-        <a:scrgbClr r="0" g="0" b="0"/>
-      </a:lnRef>
-      <a:fillRef idx="3">
-        <a:scrgbClr r="0" g="0" b="0"/>
-      </a:fillRef>
-      <a:effectRef idx="2">
-        <a:scrgbClr r="0" g="0" b="0"/>
-      </a:effectRef>
-      <a:fontRef idx="minor"/>
     </dgm:style>
   </dgm:styleLbl>
   <dgm:styleLbl name="revTx">
@@ -13346,7 +13781,7 @@
           <a:p>
             <a:fld id="{258BFD57-AB0A-470B-A7AF-56DFE7B5174A}" type="datetimeFigureOut">
               <a:rPr lang="en-US" smtClean="0"/>
-              <a:t>10/18/2026</a:t>
+              <a:t>10/19/2026</a:t>
             </a:fld>
             <a:endParaRPr lang="en-US" dirty="0"/>
           </a:p>
@@ -13523,7 +13958,7 @@
           <a:p>
             <a:fld id="{D4B3339F-6CEA-4641-BE08-40DAFD6FCF25}" type="datetimeFigureOut">
               <a:rPr lang="en-US" smtClean="0"/>
-              <a:t>10/18/2026</a:t>
+              <a:t>10/19/2026</a:t>
             </a:fld>
             <a:endParaRPr lang="en-US" dirty="0"/>
           </a:p>
@@ -20056,7 +20491,7 @@
             <a:fld id="{49AFCF02-D35E-46A4-B7A1-1A2B81F8D932}" type="datetime1">
               <a:rPr lang="en-US" smtClean="0"/>
               <a:pPr/>
-              <a:t>10/18/2026</a:t>
+              <a:t>10/19/2026</a:t>
             </a:fld>
             <a:endParaRPr lang="en-US"/>
           </a:p>
@@ -31742,8 +32177,8 @@
         </p:nvSpPr>
         <p:spPr>
           <a:xfrm>
-            <a:off x="733562" y="433906"/>
-            <a:ext cx="10865962" cy="1327464"/>
+            <a:off x="733562" y="433133"/>
+            <a:ext cx="10865962" cy="796170"/>
           </a:xfrm>
         </p:spPr>
         <p:txBody>
@@ -31761,7 +32196,7 @@
                 <a:ea typeface="+mj-ea"/>
                 <a:cs typeface="+mj-cs"/>
               </a:rPr>
-              <a:t>Mapping the Variables: Role and Geography</a:t>
+              <a:t>Selection framework: Role  and Geography</a:t>
             </a:r>
           </a:p>
         </p:txBody>
@@ -31780,12 +32215,25 @@
         </p:nvSpPr>
         <p:spPr>
           <a:xfrm>
-            <a:off x="7715892" y="2465388"/>
-            <a:ext cx="3533133" cy="3427412"/>
+            <a:off x="733562" y="2629599"/>
+            <a:ext cx="3111190" cy="3427412"/>
           </a:xfrm>
           <a:prstGeom prst="rect">
             <a:avLst/>
           </a:prstGeom>
+          <a:ln>
+            <a:solidFill>
+              <a:srgbClr val="E3FBFE"/>
+            </a:solidFill>
+          </a:ln>
+          <a:effectLst>
+            <a:glow rad="228600">
+              <a:schemeClr val="accent6">
+                <a:satMod val="175000"/>
+                <a:alpha val="40000"/>
+              </a:schemeClr>
+            </a:glow>
+          </a:effectLst>
         </p:spPr>
         <p:txBody>
           <a:bodyPr vert="horz" lIns="91440" tIns="45720" rIns="91440" bIns="45720" rtlCol="0">
@@ -31802,13 +32250,18 @@
               </a:spcBef>
             </a:pPr>
             <a:r>
-              <a:rPr lang="en-US" dirty="0">
+              <a:rPr lang="en-US" sz="2000" dirty="0">
                 <a:solidFill>
                   <a:schemeClr val="bg1"/>
                 </a:solidFill>
               </a:rPr>
-              <a:t>My goal is to make compensation ceilings and baseline disparities among data practitioners immediately visible without cognitive effort.</a:t>
+              <a:t>My goal is to make compensation ceilings and baseline disparities among data practitioners immediately visible without cognitive effort</a:t>
             </a:r>
+            <a:endParaRPr lang="en-US" dirty="0">
+              <a:solidFill>
+                <a:schemeClr val="bg1"/>
+              </a:solidFill>
+            </a:endParaRPr>
           </a:p>
         </p:txBody>
       </p:sp>
@@ -31915,14 +32368,14 @@
           <p:nvPr>
             <p:extLst>
               <p:ext uri="{D42A27DB-BD31-4B8C-83A1-F6EECF244321}">
-                <p14:modId xmlns:p14="http://schemas.microsoft.com/office/powerpoint/2010/main" val="1680590786"/>
+                <p14:modId xmlns:p14="http://schemas.microsoft.com/office/powerpoint/2010/main" val="203010992"/>
               </p:ext>
             </p:extLst>
           </p:nvPr>
         </p:nvGraphicFramePr>
         <p:xfrm>
-          <a:off x="814302" y="2465535"/>
-          <a:ext cx="7303538" cy="3427265"/>
+          <a:off x="3693310" y="2233246"/>
+          <a:ext cx="7872512" cy="4220119"/>
         </p:xfrm>
         <a:graphic>
           <a:graphicData uri="http://schemas.openxmlformats.org/drawingml/2006/diagram">
@@ -32084,36 +32537,6 @@
           </a:graphicData>
         </a:graphic>
       </p:graphicFrame>
-      <p:pic>
-        <p:nvPicPr>
-          <p:cNvPr id="3" name="Picture 2">
-            <a:extLst>
-              <a:ext uri="{FF2B5EF4-FFF2-40B4-BE49-F238E27FC236}">
-                <a16:creationId xmlns:a16="http://schemas.microsoft.com/office/drawing/2014/main" id="{0CE78890-B220-9D3A-F081-F932F058715E}"/>
-              </a:ext>
-            </a:extLst>
-          </p:cNvPr>
-          <p:cNvPicPr>
-            <a:picLocks noChangeAspect="1"/>
-          </p:cNvPicPr>
-          <p:nvPr/>
-        </p:nvPicPr>
-        <p:blipFill>
-          <a:blip r:embed="rId8"/>
-          <a:stretch>
-            <a:fillRect/>
-          </a:stretch>
-        </p:blipFill>
-        <p:spPr>
-          <a:xfrm>
-            <a:off x="403336" y="334511"/>
-            <a:ext cx="10302336" cy="4897831"/>
-          </a:xfrm>
-          <a:prstGeom prst="rect">
-            <a:avLst/>
-          </a:prstGeom>
-        </p:spPr>
-      </p:pic>
       <p:sp>
         <p:nvSpPr>
           <p:cNvPr id="8" name="Text Placeholder 3">
@@ -32130,8 +32553,8 @@
         </p:nvSpPr>
         <p:spPr>
           <a:xfrm>
-            <a:off x="307829" y="5297770"/>
-            <a:ext cx="11167385" cy="928428"/>
+            <a:off x="307829" y="5129561"/>
+            <a:ext cx="11167385" cy="1096637"/>
           </a:xfrm>
           <a:prstGeom prst="rect">
             <a:avLst/>
@@ -32212,6 +32635,15 @@
               </a:rPr>
             </a:br>
             <a:r>
+              <a:rPr lang="en-US" sz="1800" dirty="0">
+                <a:solidFill>
+                  <a:srgbClr val="F0EDE6"/>
+                </a:solidFill>
+                <a:latin typeface="Neue Haas Grotesk Text Pro"/>
+              </a:rPr>
+              <a:t>Deconstruct the </a:t>
+            </a:r>
+            <a:r>
               <a:rPr kumimoji="0" lang="en-US" sz="1800" b="0" i="0" u="none" strike="noStrike" kern="1200" cap="none" spc="-100" normalizeH="0" baseline="0" noProof="0" dirty="0">
                 <a:ln>
                   <a:noFill/>
@@ -32226,8 +32658,31 @@
                 <a:ea typeface="+mj-ea"/>
                 <a:cs typeface="+mj-cs"/>
               </a:rPr>
-              <a:t>Baseline -  Compensation is controlled by technical leverage. Moving from analytics to Data science &amp; ML and Data engineering &amp; Architecture establishes a immediate $65k baseline increase.</a:t>
+              <a:t>Baseline -  Grouping titles shows that </a:t>
             </a:r>
+            <a:r>
+              <a:rPr lang="en-US" sz="1800" dirty="0">
+                <a:solidFill>
+                  <a:srgbClr val="F0EDE6"/>
+                </a:solidFill>
+                <a:latin typeface="Neue Haas Grotesk Text Pro"/>
+              </a:rPr>
+              <a:t>Data Science and Engineering  has a higher baseline increase over Analytics. Zooming in on the 10 most frequent specific titles proves this and reveals how the shift from “Data Analyst “ to “Data Architect” triggers massive salary jump in compensation</a:t>
+            </a:r>
+            <a:endParaRPr kumimoji="0" lang="en-US" sz="1800" b="0" i="0" u="none" strike="noStrike" kern="1200" cap="none" spc="-100" normalizeH="0" baseline="0" noProof="0" dirty="0">
+              <a:ln>
+                <a:noFill/>
+              </a:ln>
+              <a:solidFill>
+                <a:srgbClr val="F0EDE6"/>
+              </a:solidFill>
+              <a:effectLst/>
+              <a:uLnTx/>
+              <a:uFillTx/>
+              <a:latin typeface="Neue Haas Grotesk Text Pro"/>
+              <a:ea typeface="+mj-ea"/>
+              <a:cs typeface="+mj-cs"/>
+            </a:endParaRPr>
           </a:p>
         </p:txBody>
       </p:sp>
@@ -32296,6 +32751,36 @@
           </a:p>
         </p:txBody>
       </p:sp>
+      <p:pic>
+        <p:nvPicPr>
+          <p:cNvPr id="4" name="Picture 3">
+            <a:extLst>
+              <a:ext uri="{FF2B5EF4-FFF2-40B4-BE49-F238E27FC236}">
+                <a16:creationId xmlns:a16="http://schemas.microsoft.com/office/drawing/2014/main" id="{857439D4-CF95-6E85-5D2F-7B9D4B8A8FD1}"/>
+              </a:ext>
+            </a:extLst>
+          </p:cNvPr>
+          <p:cNvPicPr>
+            <a:picLocks noChangeAspect="1"/>
+          </p:cNvPicPr>
+          <p:nvPr/>
+        </p:nvPicPr>
+        <p:blipFill>
+          <a:blip r:embed="rId8"/>
+          <a:stretch>
+            <a:fillRect/>
+          </a:stretch>
+        </p:blipFill>
+        <p:spPr>
+          <a:xfrm>
+            <a:off x="0" y="266677"/>
+            <a:ext cx="12192000" cy="4862884"/>
+          </a:xfrm>
+          <a:prstGeom prst="rect">
+            <a:avLst/>
+          </a:prstGeom>
+        </p:spPr>
+      </p:pic>
     </p:spTree>
     <p:extLst>
       <p:ext uri="{BB962C8B-B14F-4D97-AF65-F5344CB8AC3E}">
@@ -32651,8 +33136,8 @@
         </p:blipFill>
         <p:spPr>
           <a:xfrm>
-            <a:off x="716786" y="115721"/>
-            <a:ext cx="9967824" cy="5182049"/>
+            <a:off x="716786" y="127988"/>
+            <a:ext cx="10660912" cy="5182049"/>
           </a:xfrm>
           <a:prstGeom prst="rect">
             <a:avLst/>
@@ -33271,7 +33756,33 @@
                 <a:ea typeface="+mj-ea"/>
                 <a:cs typeface="+mj-cs"/>
               </a:rPr>
-              <a:t>Ultimate Equation -  Max compensation requires securing a high-leverage data practitioner title and anchoring it to a tier-one market. In these elite hubs, the 75th percentile of base pay alone pushes past $170,000.</a:t>
+              <a:t>Ultimate Equation -  Max compensation requires securing a high leverage data practitioner title and anchoring it to </a:t>
+            </a:r>
+            <a:r>
+              <a:rPr lang="en-US" sz="1800" dirty="0">
+                <a:solidFill>
+                  <a:srgbClr val="F0EDE6"/>
+                </a:solidFill>
+                <a:latin typeface="Neue Haas Grotesk Text Pro"/>
+              </a:rPr>
+              <a:t>the top</a:t>
+            </a:r>
+            <a:r>
+              <a:rPr kumimoji="0" lang="en-US" sz="1800" i="0" u="none" strike="noStrike" kern="1200" cap="none" spc="-100" normalizeH="0" baseline="0" noProof="0" dirty="0">
+                <a:ln>
+                  <a:noFill/>
+                </a:ln>
+                <a:solidFill>
+                  <a:srgbClr val="F0EDE6"/>
+                </a:solidFill>
+                <a:effectLst/>
+                <a:uLnTx/>
+                <a:uFillTx/>
+                <a:latin typeface="Neue Haas Grotesk Text Pro"/>
+                <a:ea typeface="+mj-ea"/>
+                <a:cs typeface="+mj-cs"/>
+              </a:rPr>
+              <a:t> market. In these elite hubs, the 75th percentile of base pay alone pushes past $170,000.</a:t>
             </a:r>
           </a:p>
         </p:txBody>
@@ -33457,16 +33968,29 @@
         </p:nvSpPr>
         <p:spPr>
           <a:xfrm>
-            <a:off x="7715892" y="2465388"/>
-            <a:ext cx="3533133" cy="3427412"/>
+            <a:off x="379141" y="2281046"/>
+            <a:ext cx="3479181" cy="3785217"/>
           </a:xfrm>
           <a:prstGeom prst="rect">
             <a:avLst/>
           </a:prstGeom>
+          <a:ln>
+            <a:solidFill>
+              <a:srgbClr val="E3FBFE"/>
+            </a:solidFill>
+          </a:ln>
+          <a:effectLst>
+            <a:glow rad="63500">
+              <a:schemeClr val="accent2">
+                <a:satMod val="175000"/>
+                <a:alpha val="40000"/>
+              </a:schemeClr>
+            </a:glow>
+          </a:effectLst>
         </p:spPr>
         <p:txBody>
           <a:bodyPr vert="horz" lIns="91440" tIns="45720" rIns="91440" bIns="45720" rtlCol="0">
-            <a:normAutofit/>
+            <a:noAutofit/>
           </a:bodyPr>
           <a:lstStyle/>
           <a:p>
@@ -33479,29 +34003,52 @@
               </a:spcBef>
             </a:pPr>
             <a:r>
-              <a:rPr lang="en-US" dirty="0">
+              <a:rPr lang="en-US" sz="2000" b="1" dirty="0">
                 <a:solidFill>
                   <a:schemeClr val="bg1"/>
                 </a:solidFill>
               </a:rPr>
-              <a:t>Compensation for Data Practitioners cannot be accurately captured by a single national average. It is a compounding equation: </a:t>
+              <a:t>ANSWER: </a:t>
             </a:r>
             <a:r>
-              <a:rPr lang="en-US" b="1" dirty="0">
+              <a:rPr lang="en-US" sz="2000" dirty="0">
                 <a:solidFill>
                   <a:schemeClr val="bg1"/>
                 </a:solidFill>
               </a:rPr>
-              <a:t>Technical Leverage + Geographic Anchoring = Maximum Income Potential.</a:t>
+              <a:t>Compensation for Data Practitioners cannot be captured by a single national average. </a:t>
             </a:r>
+          </a:p>
+          <a:p>
+            <a:pPr>
+              <a:lnSpc>
+                <a:spcPct val="100000"/>
+              </a:lnSpc>
+              <a:spcBef>
+                <a:spcPts val="1000"/>
+              </a:spcBef>
+            </a:pPr>
             <a:r>
-              <a:rPr lang="en-US" dirty="0">
+              <a:rPr lang="en-US" sz="2000" dirty="0">
                 <a:solidFill>
                   <a:schemeClr val="bg1"/>
                 </a:solidFill>
               </a:rPr>
-              <a:t>.</a:t>
+              <a:t>It is a compounding equation: </a:t>
             </a:r>
+            <a:r>
+              <a:rPr lang="en-US" sz="2000" b="1" dirty="0">
+                <a:solidFill>
+                  <a:schemeClr val="bg1"/>
+                </a:solidFill>
+              </a:rPr>
+              <a:t>Specific Technical Leverage + Geographic Anchoring = Maximum Income Potential</a:t>
+            </a:r>
+            <a:endParaRPr lang="en-US" sz="2000" dirty="0">
+              <a:solidFill>
+                <a:schemeClr val="bg1"/>
+              </a:solidFill>
+            </a:endParaRPr>
           </a:p>
         </p:txBody>
       </p:sp>
@@ -33547,7 +34094,7 @@
               </a:pPr>
               <a:t>7</a:t>
             </a:fld>
-            <a:endParaRPr lang="en-US"/>
+            <a:endParaRPr lang="en-US" dirty="0"/>
           </a:p>
         </p:txBody>
       </p:sp>
@@ -33605,11 +34152,17 @@
             </a:extLst>
           </p:cNvPr>
           <p:cNvGraphicFramePr/>
-          <p:nvPr/>
+          <p:nvPr>
+            <p:extLst>
+              <p:ext uri="{D42A27DB-BD31-4B8C-83A1-F6EECF244321}">
+                <p14:modId xmlns:p14="http://schemas.microsoft.com/office/powerpoint/2010/main" val="3948226420"/>
+              </p:ext>
+            </p:extLst>
+          </p:nvPr>
         </p:nvGraphicFramePr>
         <p:xfrm>
-          <a:off x="814302" y="2465535"/>
-          <a:ext cx="7303538" cy="3427265"/>
+          <a:off x="3858322" y="2620537"/>
+          <a:ext cx="8333678" cy="4106628"/>
         </p:xfrm>
         <a:graphic>
           <a:graphicData uri="http://schemas.openxmlformats.org/drawingml/2006/diagram">
@@ -33617,6 +34170,173 @@
           </a:graphicData>
         </a:graphic>
       </p:graphicFrame>
+      <p:sp>
+        <p:nvSpPr>
+          <p:cNvPr id="3" name="TextBox 2">
+            <a:extLst>
+              <a:ext uri="{FF2B5EF4-FFF2-40B4-BE49-F238E27FC236}">
+                <a16:creationId xmlns:a16="http://schemas.microsoft.com/office/drawing/2014/main" id="{B8E58E19-AAD7-B72A-E9F6-798F3361A028}"/>
+              </a:ext>
+            </a:extLst>
+          </p:cNvPr>
+          <p:cNvSpPr txBox="1"/>
+          <p:nvPr/>
+        </p:nvSpPr>
+        <p:spPr>
+          <a:xfrm>
+            <a:off x="6553333" y="1950401"/>
+            <a:ext cx="3560694" cy="581813"/>
+          </a:xfrm>
+          <a:prstGeom prst="rect">
+            <a:avLst/>
+          </a:prstGeom>
+          <a:ln>
+            <a:solidFill>
+              <a:srgbClr val="E3FBFE"/>
+            </a:solidFill>
+          </a:ln>
+          <a:effectLst>
+            <a:glow rad="63500">
+              <a:schemeClr val="accent2">
+                <a:satMod val="175000"/>
+                <a:alpha val="40000"/>
+              </a:schemeClr>
+            </a:glow>
+          </a:effectLst>
+        </p:spPr>
+        <p:txBody>
+          <a:bodyPr vert="horz" lIns="91440" tIns="45720" rIns="91440" bIns="45720" rtlCol="0">
+            <a:noAutofit/>
+          </a:bodyPr>
+          <a:lstStyle/>
+          <a:p>
+            <a:pPr>
+              <a:lnSpc>
+                <a:spcPct val="100000"/>
+              </a:lnSpc>
+              <a:spcBef>
+                <a:spcPts val="1000"/>
+              </a:spcBef>
+            </a:pPr>
+            <a:r>
+              <a:rPr lang="en-US" sz="2400" b="1" dirty="0">
+                <a:solidFill>
+                  <a:schemeClr val="bg1"/>
+                </a:solidFill>
+              </a:rPr>
+              <a:t>Key Takeaways: </a:t>
+            </a:r>
+          </a:p>
+        </p:txBody>
+      </p:sp>
+      <p:pic>
+        <p:nvPicPr>
+          <p:cNvPr id="6" name="Graphic 5" descr="Business Growth outline">
+            <a:extLst>
+              <a:ext uri="{FF2B5EF4-FFF2-40B4-BE49-F238E27FC236}">
+                <a16:creationId xmlns:a16="http://schemas.microsoft.com/office/drawing/2014/main" id="{A263F0AE-1506-C72F-3C04-EC7C03014237}"/>
+              </a:ext>
+            </a:extLst>
+          </p:cNvPr>
+          <p:cNvPicPr>
+            <a:picLocks noChangeAspect="1"/>
+          </p:cNvPicPr>
+          <p:nvPr/>
+        </p:nvPicPr>
+        <p:blipFill>
+          <a:blip>
+            <a:extLst>
+              <a:ext uri="{96DAC541-7B7A-43D3-8B79-37D633B846F1}">
+                <asvg:svgBlip xmlns:asvg="http://schemas.microsoft.com/office/drawing/2016/SVG/main" r:embed="rId7"/>
+              </a:ext>
+            </a:extLst>
+          </a:blip>
+          <a:stretch>
+            <a:fillRect/>
+          </a:stretch>
+        </p:blipFill>
+        <p:spPr>
+          <a:xfrm>
+            <a:off x="4020081" y="2923582"/>
+            <a:ext cx="747132" cy="747132"/>
+          </a:xfrm>
+          <a:prstGeom prst="rect">
+            <a:avLst/>
+          </a:prstGeom>
+        </p:spPr>
+      </p:pic>
+      <p:pic>
+        <p:nvPicPr>
+          <p:cNvPr id="8" name="Graphic 7" descr="Topography Map with solid fill">
+            <a:extLst>
+              <a:ext uri="{FF2B5EF4-FFF2-40B4-BE49-F238E27FC236}">
+                <a16:creationId xmlns:a16="http://schemas.microsoft.com/office/drawing/2014/main" id="{A36A003C-88F8-D424-48B0-A0D0538411E0}"/>
+              </a:ext>
+            </a:extLst>
+          </p:cNvPr>
+          <p:cNvPicPr>
+            <a:picLocks noChangeAspect="1"/>
+          </p:cNvPicPr>
+          <p:nvPr/>
+        </p:nvPicPr>
+        <p:blipFill>
+          <a:blip>
+            <a:extLst>
+              <a:ext uri="{96DAC541-7B7A-43D3-8B79-37D633B846F1}">
+                <asvg:svgBlip xmlns:asvg="http://schemas.microsoft.com/office/drawing/2016/SVG/main" r:embed="rId8"/>
+              </a:ext>
+            </a:extLst>
+          </a:blip>
+          <a:stretch>
+            <a:fillRect/>
+          </a:stretch>
+        </p:blipFill>
+        <p:spPr>
+          <a:xfrm>
+            <a:off x="4055327" y="4241903"/>
+            <a:ext cx="557562" cy="557562"/>
+          </a:xfrm>
+          <a:prstGeom prst="rect">
+            <a:avLst/>
+          </a:prstGeom>
+        </p:spPr>
+      </p:pic>
+      <p:pic>
+        <p:nvPicPr>
+          <p:cNvPr id="13" name="Graphic 12" descr="Cycle with people outline">
+            <a:extLst>
+              <a:ext uri="{FF2B5EF4-FFF2-40B4-BE49-F238E27FC236}">
+                <a16:creationId xmlns:a16="http://schemas.microsoft.com/office/drawing/2014/main" id="{B0F94EA8-894E-C379-7BE6-9DB3D0A2669C}"/>
+              </a:ext>
+            </a:extLst>
+          </p:cNvPr>
+          <p:cNvPicPr>
+            <a:picLocks noChangeAspect="1"/>
+          </p:cNvPicPr>
+          <p:nvPr/>
+        </p:nvPicPr>
+        <p:blipFill>
+          <a:blip>
+            <a:extLst>
+              <a:ext uri="{96DAC541-7B7A-43D3-8B79-37D633B846F1}">
+                <asvg:svgBlip xmlns:asvg="http://schemas.microsoft.com/office/drawing/2016/SVG/main" r:embed="rId9"/>
+              </a:ext>
+            </a:extLst>
+          </a:blip>
+          <a:stretch>
+            <a:fillRect/>
+          </a:stretch>
+        </p:blipFill>
+        <p:spPr>
+          <a:xfrm>
+            <a:off x="3971693" y="5339163"/>
+            <a:ext cx="914400" cy="914400"/>
+          </a:xfrm>
+          <a:prstGeom prst="rect">
+            <a:avLst/>
+          </a:prstGeom>
+        </p:spPr>
+      </p:pic>
     </p:spTree>
     <p:extLst>
       <p:ext uri="{BB962C8B-B14F-4D97-AF65-F5344CB8AC3E}">
@@ -34422,15 +35142,6 @@
 </file>
 
 <file path=customXml/item1.xml><?xml version="1.0" encoding="utf-8"?>
-<?mso-contentType ?>
-<FormTemplates xmlns="http://schemas.microsoft.com/sharepoint/v3/contenttype/forms">
-  <Display>DocumentLibraryForm</Display>
-  <Edit>DocumentLibraryForm</Edit>
-  <New>DocumentLibraryForm</New>
-</FormTemplates>
-</file>
-
-<file path=customXml/item2.xml><?xml version="1.0" encoding="utf-8"?>
 <p:properties xmlns:p="http://schemas.microsoft.com/office/2006/metadata/properties" xmlns:xsi="http://www.w3.org/2001/XMLSchema-instance" xmlns:pc="http://schemas.microsoft.com/office/infopath/2007/PartnerControls">
   <documentManagement>
     <_ip_UnifiedCompliancePolicyUIAction xmlns="http://schemas.microsoft.com/sharepoint/v3" xsi:nil="true"/>
@@ -34448,6 +35159,15 @@
     <MediaServiceKeyPoints xmlns="71af3243-3dd4-4a8d-8c0d-dd76da1f02a5" xsi:nil="true"/>
   </documentManagement>
 </p:properties>
+</file>
+
+<file path=customXml/item2.xml><?xml version="1.0" encoding="utf-8"?>
+<?mso-contentType ?>
+<FormTemplates xmlns="http://schemas.microsoft.com/sharepoint/v3/contenttype/forms">
+  <Display>DocumentLibraryForm</Display>
+  <Edit>DocumentLibraryForm</Edit>
+  <New>DocumentLibraryForm</New>
+</FormTemplates>
 </file>
 
 <file path=customXml/item3.xml><?xml version="1.0" encoding="utf-8"?>
@@ -34763,14 +35483,6 @@
 </file>
 
 <file path=customXml/itemProps1.xml><?xml version="1.0" encoding="utf-8"?>
-<ds:datastoreItem xmlns:ds="http://schemas.openxmlformats.org/officeDocument/2006/customXml" ds:itemID="{44137456-21FC-4AE2-8A94-BF06CAF2EB9B}">
-  <ds:schemaRefs>
-    <ds:schemaRef ds:uri="http://schemas.microsoft.com/sharepoint/v3/contenttype/forms"/>
-  </ds:schemaRefs>
-</ds:datastoreItem>
-</file>
-
-<file path=customXml/itemProps2.xml><?xml version="1.0" encoding="utf-8"?>
 <ds:datastoreItem xmlns:ds="http://schemas.openxmlformats.org/officeDocument/2006/customXml" ds:itemID="{E305301E-11B3-4B9D-A588-21F3C9809371}">
   <ds:schemaRefs>
     <ds:schemaRef ds:uri="http://schemas.microsoft.com/office/2006/metadata/properties"/>
@@ -34778,6 +35490,14 @@
     <ds:schemaRef ds:uri="http://schemas.microsoft.com/sharepoint/v3"/>
     <ds:schemaRef ds:uri="71af3243-3dd4-4a8d-8c0d-dd76da1f02a5"/>
     <ds:schemaRef ds:uri="230e9df3-be65-4c73-a93b-d1236ebd677e"/>
+  </ds:schemaRefs>
+</ds:datastoreItem>
+</file>
+
+<file path=customXml/itemProps2.xml><?xml version="1.0" encoding="utf-8"?>
+<ds:datastoreItem xmlns:ds="http://schemas.openxmlformats.org/officeDocument/2006/customXml" ds:itemID="{44137456-21FC-4AE2-8A94-BF06CAF2EB9B}">
+  <ds:schemaRefs>
+    <ds:schemaRef ds:uri="http://schemas.microsoft.com/sharepoint/v3/contenttype/forms"/>
   </ds:schemaRefs>
 </ds:datastoreItem>
 </file>
